--- a/gratings/grating_simulations_reininger.pptx
+++ b/gratings/grating_simulations_reininger.pptx
@@ -43,13 +43,12 @@
     <p:sldId id="292" r:id="rId37"/>
     <p:sldId id="296" r:id="rId38"/>
     <p:sldId id="297" r:id="rId39"/>
-    <p:sldId id="299" r:id="rId40"/>
-    <p:sldId id="328" r:id="rId41"/>
-    <p:sldId id="300" r:id="rId42"/>
-    <p:sldId id="301" r:id="rId43"/>
-    <p:sldId id="302" r:id="rId44"/>
-    <p:sldId id="303" r:id="rId45"/>
-    <p:sldId id="304" r:id="rId46"/>
+    <p:sldId id="328" r:id="rId40"/>
+    <p:sldId id="300" r:id="rId41"/>
+    <p:sldId id="301" r:id="rId42"/>
+    <p:sldId id="302" r:id="rId43"/>
+    <p:sldId id="303" r:id="rId44"/>
+    <p:sldId id="304" r:id="rId45"/>
   </p:sldIdLst>
   <p:sldSz cx="13004800" cy="9753600"/>
   <p:notesSz cx="13004800" cy="9753600"/>
@@ -355,7 +354,7 @@
           <a:p>
             <a:fld id="{1D8BD707-D9CF-40AE-B4C6-C98DA3205C09}" type="datetimeFigureOut">
               <a:rPr lang="en-US"/>
-              <a:t>25/04/2025</a:t>
+              <a:t>20/04/2026</a:t>
             </a:fld>
             <a:endParaRPr lang="en-US"/>
           </a:p>
@@ -616,7 +615,7 @@
           <a:p>
             <a:fld id="{1D8BD707-D9CF-40AE-B4C6-C98DA3205C09}" type="datetimeFigureOut">
               <a:rPr lang="en-US"/>
-              <a:t>25/04/2025</a:t>
+              <a:t>20/04/2026</a:t>
             </a:fld>
             <a:endParaRPr lang="en-US"/>
           </a:p>
@@ -914,7 +913,7 @@
           <a:p>
             <a:fld id="{1D8BD707-D9CF-40AE-B4C6-C98DA3205C09}" type="datetimeFigureOut">
               <a:rPr lang="en-US"/>
-              <a:t>25/04/2025</a:t>
+              <a:t>20/04/2026</a:t>
             </a:fld>
             <a:endParaRPr lang="en-US"/>
           </a:p>
@@ -1154,7 +1153,7 @@
           <a:p>
             <a:fld id="{1D8BD707-D9CF-40AE-B4C6-C98DA3205C09}" type="datetimeFigureOut">
               <a:rPr lang="en-US"/>
-              <a:t>25/04/2025</a:t>
+              <a:t>20/04/2026</a:t>
             </a:fld>
             <a:endParaRPr lang="en-US"/>
           </a:p>
@@ -1357,7 +1356,7 @@
           <a:p>
             <a:fld id="{1D8BD707-D9CF-40AE-B4C6-C98DA3205C09}" type="datetimeFigureOut">
               <a:rPr lang="en-US"/>
-              <a:t>25/04/2025</a:t>
+              <a:t>20/04/2026</a:t>
             </a:fld>
             <a:endParaRPr lang="en-US"/>
           </a:p>
@@ -1688,7 +1687,7 @@
           <a:p>
             <a:fld id="{1D8BD707-D9CF-40AE-B4C6-C98DA3205C09}" type="datetimeFigureOut">
               <a:rPr lang="en-US"/>
-              <a:t>25/04/2025</a:t>
+              <a:t>20/04/2026</a:t>
             </a:fld>
             <a:endParaRPr lang="en-US"/>
           </a:p>
@@ -2731,7 +2730,7 @@
         <p:spPr>
           <a:xfrm>
             <a:off x="850316" y="8458200"/>
-            <a:ext cx="9443611" cy="646331"/>
+            <a:ext cx="9982220" cy="923330"/>
           </a:xfrm>
           <a:prstGeom prst="rect">
             <a:avLst/>
@@ -2765,7 +2764,17 @@
                   <a:srgbClr val="FF0000"/>
                 </a:solidFill>
               </a:rPr>
-              <a:t>Beamline Optics Design and Simulation Workshop, DESY, Hamburg  19-22 May 2025</a:t>
+              <a:t>Beamline Optics Design and Simulation Workshop, DESY, Hamburg  19-22 May 2025 and </a:t>
+            </a:r>
+          </a:p>
+          <a:p>
+            <a:r>
+              <a:rPr lang="en-US" b="1" dirty="0">
+                <a:solidFill>
+                  <a:srgbClr val="FF0000"/>
+                </a:solidFill>
+              </a:rPr>
+              <a:t>ESRF-ENRICH OASYS School, Grenoble  20-22 May 2026</a:t>
             </a:r>
             <a:endParaRPr lang="en-GB" b="1" dirty="0">
               <a:solidFill>
@@ -22758,7 +22767,7 @@
               </a:rPr>
               <a:t>α</a:t>
             </a:r>
-            <a:endParaRPr sz="2750">
+            <a:endParaRPr sz="2750" dirty="0">
               <a:latin typeface="Cambria"/>
               <a:cs typeface="Cambria"/>
             </a:endParaRPr>
@@ -22824,7 +22833,7 @@
               </a:rPr>
               <a:t>Equation:</a:t>
             </a:r>
-            <a:endParaRPr sz="2750">
+            <a:endParaRPr sz="2750" dirty="0">
               <a:latin typeface="Cambria"/>
               <a:cs typeface="Cambria"/>
             </a:endParaRPr>
@@ -22927,7 +22936,7 @@
         </p:nvSpPr>
         <p:spPr>
           <a:xfrm>
-            <a:off x="2955234" y="5226234"/>
+            <a:off x="2768600" y="5105400"/>
             <a:ext cx="167005" cy="322580"/>
           </a:xfrm>
           <a:prstGeom prst="rect">
@@ -23019,126 +23028,116 @@
               <a:t>	</a:t>
             </a:r>
             <a:r>
-              <a:rPr sz="2750" i="1" spc="-605" dirty="0">
+              <a:rPr lang="en-GB" sz="2750" i="1" spc="-605" dirty="0">
                 <a:solidFill>
                   <a:srgbClr val="FF0000"/>
                 </a:solidFill>
                 <a:latin typeface="Arial"/>
                 <a:cs typeface="Arial"/>
               </a:rPr>
-              <a:t>—</a:t>
-            </a:r>
-            <a:r>
-              <a:rPr sz="2750" i="1" spc="-145" dirty="0">
+              <a:t>-       </a:t>
+            </a:r>
+            <a:r>
+              <a:rPr sz="2750" spc="-25" dirty="0">
+                <a:solidFill>
+                  <a:srgbClr val="FF0000"/>
+                </a:solidFill>
+                <a:latin typeface="Cambria"/>
+                <a:cs typeface="Cambria"/>
+              </a:rPr>
+              <a:t>sin</a:t>
+            </a:r>
+            <a:r>
+              <a:rPr sz="2750" spc="-135" dirty="0">
+                <a:solidFill>
+                  <a:srgbClr val="FF0000"/>
+                </a:solidFill>
+                <a:latin typeface="Cambria"/>
+                <a:cs typeface="Cambria"/>
+              </a:rPr>
+              <a:t> </a:t>
+            </a:r>
+            <a:r>
+              <a:rPr sz="2750" i="1" spc="120" dirty="0">
+                <a:solidFill>
+                  <a:srgbClr val="FF0000"/>
+                </a:solidFill>
+                <a:latin typeface="Cambria"/>
+                <a:cs typeface="Cambria"/>
+              </a:rPr>
+              <a:t>β</a:t>
+            </a:r>
+            <a:r>
+              <a:rPr sz="2750" spc="120" dirty="0">
+                <a:solidFill>
+                  <a:srgbClr val="FF0000"/>
+                </a:solidFill>
+                <a:latin typeface="Cambria"/>
+                <a:cs typeface="Cambria"/>
+              </a:rPr>
+              <a:t>)</a:t>
+            </a:r>
+            <a:r>
+              <a:rPr lang="en-GB" sz="2750" dirty="0">
+                <a:solidFill>
+                  <a:srgbClr val="FF0000"/>
+                </a:solidFill>
+                <a:latin typeface="Cambria"/>
+                <a:cs typeface="Cambria"/>
+              </a:rPr>
+              <a:t>	</a:t>
+            </a:r>
+            <a:r>
+              <a:rPr sz="2750" spc="640" dirty="0">
+                <a:solidFill>
+                  <a:srgbClr val="FF0000"/>
+                </a:solidFill>
+                <a:latin typeface="Cambria"/>
+                <a:cs typeface="Cambria"/>
+              </a:rPr>
+              <a:t>=</a:t>
+            </a:r>
+            <a:r>
+              <a:rPr sz="2750" spc="90" dirty="0">
+                <a:solidFill>
+                  <a:srgbClr val="FF0000"/>
+                </a:solidFill>
+                <a:latin typeface="Cambria"/>
+                <a:cs typeface="Cambria"/>
+              </a:rPr>
+              <a:t> </a:t>
+            </a:r>
+            <a:r>
+              <a:rPr sz="2750" dirty="0">
+                <a:solidFill>
+                  <a:srgbClr val="FF0000"/>
+                </a:solidFill>
+                <a:latin typeface="Cambria"/>
+                <a:cs typeface="Cambria"/>
+              </a:rPr>
+              <a:t>1</a:t>
+            </a:r>
+            <a:r>
+              <a:rPr sz="2750" spc="-50" dirty="0">
+                <a:solidFill>
+                  <a:srgbClr val="FF0000"/>
+                </a:solidFill>
+                <a:latin typeface="Cambria"/>
+                <a:cs typeface="Cambria"/>
+              </a:rPr>
+              <a:t> </a:t>
+            </a:r>
+            <a:r>
+              <a:rPr lang="en-US" sz="2750" i="1" spc="-655" dirty="0">
                 <a:solidFill>
                   <a:srgbClr val="FF0000"/>
                 </a:solidFill>
                 <a:latin typeface="Arial"/>
                 <a:cs typeface="Arial"/>
               </a:rPr>
-              <a:t> </a:t>
-            </a:r>
-            <a:r>
-              <a:rPr sz="2750" spc="-25" dirty="0">
-                <a:solidFill>
-                  <a:srgbClr val="FF0000"/>
-                </a:solidFill>
-                <a:latin typeface="Cambria"/>
-                <a:cs typeface="Cambria"/>
-              </a:rPr>
-              <a:t>sin</a:t>
-            </a:r>
-            <a:r>
-              <a:rPr sz="2750" spc="-135" dirty="0">
-                <a:solidFill>
-                  <a:srgbClr val="FF0000"/>
-                </a:solidFill>
-                <a:latin typeface="Cambria"/>
-                <a:cs typeface="Cambria"/>
-              </a:rPr>
-              <a:t> </a:t>
-            </a:r>
-            <a:r>
-              <a:rPr sz="2750" i="1" spc="120" dirty="0">
-                <a:solidFill>
-                  <a:srgbClr val="FF0000"/>
-                </a:solidFill>
-                <a:latin typeface="Cambria"/>
-                <a:cs typeface="Cambria"/>
-              </a:rPr>
-              <a:t>β</a:t>
-            </a:r>
-            <a:r>
-              <a:rPr sz="2750" spc="120" dirty="0">
-                <a:solidFill>
-                  <a:srgbClr val="FF0000"/>
-                </a:solidFill>
-                <a:latin typeface="Cambria"/>
-                <a:cs typeface="Cambria"/>
-              </a:rPr>
-              <a:t>)</a:t>
-            </a:r>
-            <a:r>
-              <a:rPr sz="2750" dirty="0">
-                <a:solidFill>
-                  <a:srgbClr val="FF0000"/>
-                </a:solidFill>
-                <a:latin typeface="Cambria"/>
-                <a:cs typeface="Cambria"/>
-              </a:rPr>
-              <a:t>	</a:t>
-            </a:r>
-            <a:r>
-              <a:rPr sz="2750" spc="640" dirty="0">
-                <a:solidFill>
-                  <a:srgbClr val="FF0000"/>
-                </a:solidFill>
-                <a:latin typeface="Cambria"/>
-                <a:cs typeface="Cambria"/>
-              </a:rPr>
-              <a:t>=</a:t>
-            </a:r>
-            <a:r>
-              <a:rPr sz="2750" spc="90" dirty="0">
-                <a:solidFill>
-                  <a:srgbClr val="FF0000"/>
-                </a:solidFill>
-                <a:latin typeface="Cambria"/>
-                <a:cs typeface="Cambria"/>
-              </a:rPr>
-              <a:t> </a:t>
-            </a:r>
-            <a:r>
-              <a:rPr sz="2750" dirty="0">
-                <a:solidFill>
-                  <a:srgbClr val="FF0000"/>
-                </a:solidFill>
-                <a:latin typeface="Cambria"/>
-                <a:cs typeface="Cambria"/>
-              </a:rPr>
-              <a:t>1</a:t>
-            </a:r>
-            <a:r>
-              <a:rPr sz="2750" spc="-50" dirty="0">
-                <a:solidFill>
-                  <a:srgbClr val="FF0000"/>
-                </a:solidFill>
-                <a:latin typeface="Cambria"/>
-                <a:cs typeface="Cambria"/>
-              </a:rPr>
-              <a:t> </a:t>
-            </a:r>
-            <a:r>
-              <a:rPr sz="2750" i="1" spc="-655" dirty="0">
-                <a:solidFill>
-                  <a:srgbClr val="FF0000"/>
-                </a:solidFill>
-                <a:latin typeface="Arial"/>
-                <a:cs typeface="Arial"/>
-              </a:rPr>
-              <a:t>—</a:t>
-            </a:r>
-            <a:endParaRPr sz="2750">
+              <a:t>- </a:t>
+            </a:r>
+            <a:endParaRPr sz="2750" dirty="0">
               <a:latin typeface="Arial"/>
               <a:cs typeface="Arial"/>
             </a:endParaRPr>
@@ -23159,7 +23158,7 @@
               </a:rPr>
               <a:t>d</a:t>
             </a:r>
-            <a:endParaRPr sz="2750">
+            <a:endParaRPr sz="2750" dirty="0">
               <a:latin typeface="Cambria"/>
               <a:cs typeface="Cambria"/>
             </a:endParaRPr>
@@ -23174,8 +23173,8 @@
         </p:nvSpPr>
         <p:spPr>
           <a:xfrm>
-            <a:off x="4213763" y="5026885"/>
-            <a:ext cx="1677670" cy="450215"/>
+            <a:off x="4143303" y="4897318"/>
+            <a:ext cx="2517237" cy="440505"/>
           </a:xfrm>
           <a:prstGeom prst="rect">
             <a:avLst/>
@@ -23216,17 +23215,17 @@
               <a:t> </a:t>
             </a:r>
             <a:r>
-              <a:rPr sz="2750" i="1" spc="-605" dirty="0">
+              <a:rPr lang="en-GB" sz="2750" i="1" spc="-605" dirty="0">
                 <a:solidFill>
                   <a:srgbClr val="FF0000"/>
                 </a:solidFill>
                 <a:latin typeface="Arial"/>
                 <a:cs typeface="Arial"/>
               </a:rPr>
-              <a:t>—</a:t>
-            </a:r>
-            <a:r>
-              <a:rPr sz="2750" i="1" spc="-145" dirty="0">
+              <a:t>- </a:t>
+            </a:r>
+            <a:r>
+              <a:rPr lang="en-GB" sz="2750" i="1" spc="-145" dirty="0">
                 <a:solidFill>
                   <a:srgbClr val="FF0000"/>
                 </a:solidFill>
@@ -23275,7 +23274,17 @@
               </a:rPr>
               <a:t>β</a:t>
             </a:r>
-            <a:endParaRPr sz="2750">
+            <a:r>
+              <a:rPr lang="en-US" sz="2750" i="1" spc="55" dirty="0">
+                <a:solidFill>
+                  <a:srgbClr val="FF0000"/>
+                </a:solidFill>
+                <a:latin typeface="Cambria"/>
+                <a:cs typeface="Cambria"/>
+              </a:rPr>
+              <a:t>)</a:t>
+            </a:r>
+            <a:endParaRPr sz="2750" dirty="0">
               <a:latin typeface="Cambria"/>
               <a:cs typeface="Cambria"/>
             </a:endParaRPr>
@@ -23290,7 +23299,7 @@
         </p:nvSpPr>
         <p:spPr>
           <a:xfrm>
-            <a:off x="4251863" y="5544159"/>
+            <a:off x="4242765" y="5387524"/>
             <a:ext cx="1620520" cy="0"/>
           </a:xfrm>
           <a:custGeom>
@@ -23332,7 +23341,7 @@
         </p:nvSpPr>
         <p:spPr>
           <a:xfrm>
-            <a:off x="4867605" y="5406602"/>
+            <a:off x="4775795" y="5387467"/>
             <a:ext cx="370840" cy="450215"/>
           </a:xfrm>
           <a:prstGeom prst="rect">
@@ -23373,7 +23382,7 @@
               </a:rPr>
               <a:t>2</a:t>
             </a:r>
-            <a:endParaRPr sz="1950">
+            <a:endParaRPr sz="1950" dirty="0">
               <a:latin typeface="Calibri"/>
               <a:cs typeface="Calibri"/>
             </a:endParaRPr>
@@ -23559,52 +23568,6 @@
             <a:endParaRPr sz="1200">
               <a:latin typeface="Calibri"/>
               <a:cs typeface="Calibri"/>
-            </a:endParaRPr>
-          </a:p>
-        </p:txBody>
-      </p:sp>
-      <p:sp>
-        <p:nvSpPr>
-          <p:cNvPr id="20" name="object 20"/>
-          <p:cNvSpPr txBox="1"/>
-          <p:nvPr/>
-        </p:nvSpPr>
-        <p:spPr>
-          <a:xfrm>
-            <a:off x="5901593" y="5266183"/>
-            <a:ext cx="163195" cy="450215"/>
-          </a:xfrm>
-          <a:prstGeom prst="rect">
-            <a:avLst/>
-          </a:prstGeom>
-        </p:spPr>
-        <p:txBody>
-          <a:bodyPr vert="horz" wrap="square" lIns="0" tIns="17145" rIns="0" bIns="0" rtlCol="0">
-            <a:spAutoFit/>
-          </a:bodyPr>
-          <a:lstStyle/>
-          <a:p>
-            <a:pPr marL="12700">
-              <a:lnSpc>
-                <a:spcPct val="100000"/>
-              </a:lnSpc>
-              <a:spcBef>
-                <a:spcPts val="135"/>
-              </a:spcBef>
-            </a:pPr>
-            <a:r>
-              <a:rPr sz="2750" spc="-50" dirty="0">
-                <a:solidFill>
-                  <a:srgbClr val="FF0000"/>
-                </a:solidFill>
-                <a:latin typeface="Cambria"/>
-                <a:cs typeface="Cambria"/>
-              </a:rPr>
-              <a:t>)</a:t>
-            </a:r>
-            <a:endParaRPr sz="2750">
-              <a:latin typeface="Cambria"/>
-              <a:cs typeface="Cambria"/>
             </a:endParaRPr>
           </a:p>
         </p:txBody>
@@ -31969,8 +31932,8 @@
         </p:nvSpPr>
         <p:spPr>
           <a:xfrm>
-            <a:off x="11214100" y="6692900"/>
-            <a:ext cx="1550035" cy="1502975"/>
+            <a:off x="11412958" y="6419047"/>
+            <a:ext cx="1550035" cy="3244477"/>
           </a:xfrm>
           <a:prstGeom prst="rect">
             <a:avLst/>
@@ -31991,48 +31954,159 @@
               </a:spcBef>
             </a:pPr>
             <a:r>
-              <a:rPr sz="2400" dirty="0">
+              <a:rPr sz="1600" dirty="0">
                 <a:latin typeface="Arial MT"/>
                 <a:cs typeface="Arial MT"/>
               </a:rPr>
               <a:t>With</a:t>
             </a:r>
             <a:r>
-              <a:rPr sz="2400" spc="-30" dirty="0">
+              <a:rPr sz="1600" spc="-30" dirty="0">
                 <a:latin typeface="Arial MT"/>
                 <a:cs typeface="Arial MT"/>
               </a:rPr>
               <a:t> </a:t>
             </a:r>
-            <a:r>
-              <a:rPr sz="2400" spc="-25" dirty="0">
+            <a:endParaRPr lang="en-US" sz="1600" spc="-30" dirty="0">
+              <a:latin typeface="Arial MT"/>
+              <a:cs typeface="Arial MT"/>
+            </a:endParaRPr>
+          </a:p>
+          <a:p>
+            <a:pPr marL="12700" marR="280670">
+              <a:lnSpc>
+                <a:spcPts val="2800"/>
+              </a:lnSpc>
+              <a:spcBef>
+                <a:spcPts val="259"/>
+              </a:spcBef>
+            </a:pPr>
+            <a:r>
+              <a:rPr sz="1600" spc="-25" dirty="0">
                 <a:latin typeface="Arial MT"/>
                 <a:cs typeface="Arial MT"/>
               </a:rPr>
-              <a:t>SE </a:t>
-            </a:r>
-            <a:r>
-              <a:rPr sz="2400" dirty="0">
+              <a:t>S</a:t>
+            </a:r>
+            <a:r>
+              <a:rPr lang="en-US" sz="1600" spc="-25" dirty="0">
                 <a:latin typeface="Arial MT"/>
                 <a:cs typeface="Arial MT"/>
               </a:rPr>
-              <a:t>on</a:t>
-            </a:r>
-            <a:r>
-              <a:rPr sz="2400" spc="-75" dirty="0">
+              <a:t>lope </a:t>
+            </a:r>
+            <a:r>
+              <a:rPr sz="1600" spc="-25" dirty="0">
                 <a:latin typeface="Arial MT"/>
                 <a:cs typeface="Arial MT"/>
               </a:rPr>
-              <a:t> </a:t>
-            </a:r>
-            <a:r>
-              <a:rPr sz="2400" spc="-55" dirty="0">
+              <a:t>E</a:t>
+            </a:r>
+            <a:r>
+              <a:rPr lang="en-US" sz="1600" spc="-25" dirty="0">
                 <a:latin typeface="Arial MT"/>
                 <a:cs typeface="Arial MT"/>
               </a:rPr>
+              <a:t>rrors</a:t>
+            </a:r>
+            <a:r>
+              <a:rPr sz="1600" spc="-25" dirty="0">
+                <a:latin typeface="Arial MT"/>
+                <a:cs typeface="Arial MT"/>
+              </a:rPr>
+              <a:t> </a:t>
+            </a:r>
+            <a:r>
+              <a:rPr sz="1600" dirty="0">
+                <a:latin typeface="Arial MT"/>
+                <a:cs typeface="Arial MT"/>
+              </a:rPr>
+              <a:t>on</a:t>
+            </a:r>
+            <a:r>
+              <a:rPr sz="1600" spc="-75" dirty="0">
+                <a:latin typeface="Arial MT"/>
+                <a:cs typeface="Arial MT"/>
+              </a:rPr>
+              <a:t> </a:t>
+            </a:r>
+            <a:r>
+              <a:rPr sz="1600" spc="-55" dirty="0">
+                <a:latin typeface="Arial MT"/>
+                <a:cs typeface="Arial MT"/>
+              </a:rPr>
               <a:t>Toroid</a:t>
             </a:r>
-            <a:endParaRPr sz="2400" dirty="0">
+            <a:endParaRPr lang="en-US" sz="1600" spc="-55" dirty="0">
+              <a:latin typeface="Arial MT"/>
+              <a:cs typeface="Arial MT"/>
+            </a:endParaRPr>
+          </a:p>
+          <a:p>
+            <a:pPr marL="12700" marR="280670">
+              <a:lnSpc>
+                <a:spcPts val="2800"/>
+              </a:lnSpc>
+              <a:spcBef>
+                <a:spcPts val="259"/>
+              </a:spcBef>
+            </a:pPr>
+            <a:endParaRPr lang="en-US" sz="1600" spc="-55" dirty="0">
+              <a:latin typeface="Arial MT"/>
+              <a:cs typeface="Arial MT"/>
+            </a:endParaRPr>
+          </a:p>
+          <a:p>
+            <a:pPr marL="12700" marR="280670">
+              <a:lnSpc>
+                <a:spcPts val="2800"/>
+              </a:lnSpc>
+              <a:spcBef>
+                <a:spcPts val="259"/>
+              </a:spcBef>
+            </a:pPr>
+            <a:r>
+              <a:rPr lang="en-US" sz="1600" spc="-55" dirty="0">
+                <a:latin typeface="Arial MT"/>
+                <a:cs typeface="Arial MT"/>
+              </a:rPr>
+              <a:t>Without </a:t>
+            </a:r>
+          </a:p>
+          <a:p>
+            <a:pPr marL="12700" marR="280670">
+              <a:lnSpc>
+                <a:spcPts val="2800"/>
+              </a:lnSpc>
+              <a:spcBef>
+                <a:spcPts val="259"/>
+              </a:spcBef>
+            </a:pPr>
+            <a:r>
+              <a:rPr lang="en-US" sz="1600" spc="-55" dirty="0">
+                <a:latin typeface="Arial MT"/>
+                <a:cs typeface="Arial MT"/>
+              </a:rPr>
+              <a:t>Slope Errors </a:t>
+            </a:r>
+          </a:p>
+          <a:p>
+            <a:pPr marL="12700" marR="280670">
+              <a:lnSpc>
+                <a:spcPts val="2800"/>
+              </a:lnSpc>
+              <a:spcBef>
+                <a:spcPts val="259"/>
+              </a:spcBef>
+            </a:pPr>
+            <a:r>
+              <a:rPr lang="en-US" sz="1600" spc="-55" dirty="0">
+                <a:latin typeface="Arial MT"/>
+                <a:cs typeface="Arial MT"/>
+              </a:rPr>
+              <a:t>On Toroid</a:t>
+            </a:r>
+            <a:endParaRPr sz="1600" dirty="0">
               <a:latin typeface="Arial MT"/>
               <a:cs typeface="Arial MT"/>
             </a:endParaRPr>
@@ -32043,7 +32117,7 @@
                 <a:spcPct val="100000"/>
               </a:lnSpc>
             </a:pPr>
-            <a:endParaRPr sz="2400" dirty="0">
+            <a:endParaRPr sz="1600" dirty="0">
               <a:latin typeface="Arial MT"/>
               <a:cs typeface="Arial MT"/>
             </a:endParaRPr>
@@ -32057,7 +32131,7 @@
                 <a:spcPts val="80"/>
               </a:spcBef>
             </a:pPr>
-            <a:endParaRPr sz="2400" dirty="0">
+            <a:endParaRPr sz="1600" dirty="0">
               <a:latin typeface="Arial MT"/>
               <a:cs typeface="Arial MT"/>
             </a:endParaRPr>
@@ -32261,7 +32335,7 @@
         </p:nvSpPr>
         <p:spPr>
           <a:xfrm>
-            <a:off x="26762" y="46041"/>
+            <a:off x="26762" y="0"/>
             <a:ext cx="4724370" cy="369332"/>
           </a:xfrm>
           <a:prstGeom prst="rect">
@@ -32352,10 +32426,10 @@
       </p:cxnSp>
       <p:pic>
         <p:nvPicPr>
-          <p:cNvPr id="23" name="Picture 22">
+          <p:cNvPr id="4" name="Picture 3">
             <a:extLst>
               <a:ext uri="{FF2B5EF4-FFF2-40B4-BE49-F238E27FC236}">
-                <a16:creationId xmlns:a16="http://schemas.microsoft.com/office/drawing/2014/main" id="{FFDDB0F4-05FD-47DD-A957-D3BE134B088A}"/>
+                <a16:creationId xmlns:a16="http://schemas.microsoft.com/office/drawing/2014/main" id="{42E22C17-503E-46B9-BACF-C3841A9B3F88}"/>
               </a:ext>
             </a:extLst>
           </p:cNvPr>
@@ -32372,8 +32446,8 @@
         </p:blipFill>
         <p:spPr>
           <a:xfrm>
-            <a:off x="7262902" y="2602153"/>
-            <a:ext cx="4497755" cy="3903224"/>
+            <a:off x="7183519" y="2216810"/>
+            <a:ext cx="4802148" cy="4067005"/>
           </a:xfrm>
           <a:prstGeom prst="rect">
             <a:avLst/>
@@ -32382,10 +32456,10 @@
       </p:pic>
       <p:pic>
         <p:nvPicPr>
-          <p:cNvPr id="25" name="Picture 24">
+          <p:cNvPr id="5" name="Picture 4">
             <a:extLst>
               <a:ext uri="{FF2B5EF4-FFF2-40B4-BE49-F238E27FC236}">
-                <a16:creationId xmlns:a16="http://schemas.microsoft.com/office/drawing/2014/main" id="{CFF4D52E-29E9-461A-A00F-D5188987CD65}"/>
+                <a16:creationId xmlns:a16="http://schemas.microsoft.com/office/drawing/2014/main" id="{4F798D18-29A6-4FAC-BB94-32BEE1E1DEBC}"/>
               </a:ext>
             </a:extLst>
           </p:cNvPr>
@@ -32402,8 +32476,38 @@
         </p:blipFill>
         <p:spPr>
           <a:xfrm>
-            <a:off x="7481716" y="6631846"/>
-            <a:ext cx="3662388" cy="1097103"/>
+            <a:off x="8026400" y="6605644"/>
+            <a:ext cx="3060311" cy="785756"/>
+          </a:xfrm>
+          <a:prstGeom prst="rect">
+            <a:avLst/>
+          </a:prstGeom>
+        </p:spPr>
+      </p:pic>
+      <p:pic>
+        <p:nvPicPr>
+          <p:cNvPr id="6" name="Picture 5">
+            <a:extLst>
+              <a:ext uri="{FF2B5EF4-FFF2-40B4-BE49-F238E27FC236}">
+                <a16:creationId xmlns:a16="http://schemas.microsoft.com/office/drawing/2014/main" id="{BDDF2CA3-2C32-4F4F-9DD1-F743D187BFE8}"/>
+              </a:ext>
+            </a:extLst>
+          </p:cNvPr>
+          <p:cNvPicPr>
+            <a:picLocks noChangeAspect="1"/>
+          </p:cNvPicPr>
+          <p:nvPr/>
+        </p:nvPicPr>
+        <p:blipFill>
+          <a:blip r:embed="rId7"/>
+          <a:stretch>
+            <a:fillRect/>
+          </a:stretch>
+        </p:blipFill>
+        <p:spPr>
+          <a:xfrm>
+            <a:off x="8070434" y="8065954"/>
+            <a:ext cx="3201226" cy="785756"/>
           </a:xfrm>
           <a:prstGeom prst="rect">
             <a:avLst/>
@@ -38349,7 +38453,7 @@
                 </a:rPr>
                 <a:t>≈</a:t>
               </a:r>
-              <a:endParaRPr sz="3800">
+              <a:endParaRPr sz="3800" dirty="0">
                 <a:latin typeface="Arial MT"/>
                 <a:cs typeface="Arial MT"/>
               </a:endParaRPr>
@@ -40354,6 +40458,42 @@
           </a:prstGeom>
         </p:spPr>
       </p:pic>
+      <p:sp>
+        <p:nvSpPr>
+          <p:cNvPr id="5" name="TextBox 4">
+            <a:extLst>
+              <a:ext uri="{FF2B5EF4-FFF2-40B4-BE49-F238E27FC236}">
+                <a16:creationId xmlns:a16="http://schemas.microsoft.com/office/drawing/2014/main" id="{57037755-ADA0-407A-82B7-E0C3421D5E30}"/>
+              </a:ext>
+            </a:extLst>
+          </p:cNvPr>
+          <p:cNvSpPr txBox="1"/>
+          <p:nvPr/>
+        </p:nvSpPr>
+        <p:spPr>
+          <a:xfrm>
+            <a:off x="4870970" y="5059180"/>
+            <a:ext cx="261610" cy="369332"/>
+          </a:xfrm>
+          <a:prstGeom prst="rect">
+            <a:avLst/>
+          </a:prstGeom>
+          <a:noFill/>
+        </p:spPr>
+        <p:txBody>
+          <a:bodyPr wrap="none" rtlCol="0">
+            <a:spAutoFit/>
+          </a:bodyPr>
+          <a:lstStyle/>
+          <a:p>
+            <a:r>
+              <a:rPr lang="en-US" dirty="0"/>
+              <a:t>-</a:t>
+            </a:r>
+            <a:endParaRPr lang="en-GB" dirty="0"/>
+          </a:p>
+        </p:txBody>
+      </p:sp>
     </p:spTree>
   </p:cSld>
   <p:clrMapOvr>
@@ -41079,70 +41219,105 @@
               <a:t> </a:t>
             </a:r>
             <a:r>
-              <a:rPr sz="2400" dirty="0">
+              <a:rPr sz="2000" dirty="0">
                 <a:latin typeface="Times New Roman"/>
                 <a:cs typeface="Times New Roman"/>
               </a:rPr>
-              <a:t>R. R </a:t>
-            </a:r>
-            <a:r>
-              <a:rPr sz="2400" spc="-30" dirty="0">
+              <a:t>R. </a:t>
+            </a:r>
+            <a:r>
+              <a:rPr sz="2000" dirty="0" err="1">
                 <a:latin typeface="Times New Roman"/>
                 <a:cs typeface="Times New Roman"/>
               </a:rPr>
-              <a:t>&amp;</a:t>
-            </a:r>
-            <a:r>
-              <a:rPr sz="2400" spc="-170" dirty="0">
+              <a:t>R</a:t>
+            </a:r>
+            <a:r>
+              <a:rPr lang="en-US" sz="2000" dirty="0" err="1">
                 <a:latin typeface="Times New Roman"/>
                 <a:cs typeface="Times New Roman"/>
               </a:rPr>
-              <a:t> </a:t>
-            </a:r>
-            <a:r>
-              <a:rPr sz="2400" dirty="0">
+              <a:t>eininger</a:t>
+            </a:r>
+            <a:r>
+              <a:rPr sz="2000" dirty="0">
                 <a:latin typeface="Times New Roman"/>
                 <a:cs typeface="Times New Roman"/>
               </a:rPr>
-              <a:t>A. R. B. C, NIM</a:t>
-            </a:r>
-            <a:r>
-              <a:rPr sz="2400" spc="-170" dirty="0">
+              <a:t> </a:t>
+            </a:r>
+            <a:r>
+              <a:rPr sz="2000" spc="-30" dirty="0">
                 <a:latin typeface="Times New Roman"/>
                 <a:cs typeface="Times New Roman"/>
               </a:rPr>
-              <a:t> </a:t>
-            </a:r>
-            <a:r>
-              <a:rPr sz="2400" dirty="0">
+              <a:t>&amp;</a:t>
+            </a:r>
+            <a:r>
+              <a:rPr sz="2000" spc="-170" dirty="0">
                 <a:latin typeface="Times New Roman"/>
                 <a:cs typeface="Times New Roman"/>
               </a:rPr>
-              <a:t>A</a:t>
-            </a:r>
-            <a:r>
-              <a:rPr sz="2400" spc="-170" dirty="0">
+              <a:t> </a:t>
+            </a:r>
+            <a:r>
+              <a:rPr sz="2000" dirty="0">
                 <a:latin typeface="Times New Roman"/>
                 <a:cs typeface="Times New Roman"/>
               </a:rPr>
-              <a:t> </a:t>
-            </a:r>
-            <a:r>
-              <a:rPr sz="2400" dirty="0">
+              <a:t>A. R. B. C</a:t>
+            </a:r>
+            <a:r>
+              <a:rPr lang="en-US" sz="2000" dirty="0">
                 <a:latin typeface="Times New Roman"/>
                 <a:cs typeface="Times New Roman"/>
               </a:rPr>
-              <a:t>538, 760</a:t>
-            </a:r>
-            <a:r>
-              <a:rPr lang="en-GB" sz="2400" dirty="0">
+              <a:t>astro</a:t>
+            </a:r>
+            <a:r>
+              <a:rPr sz="2000" dirty="0">
                 <a:latin typeface="Times New Roman"/>
                 <a:cs typeface="Times New Roman"/>
               </a:rPr>
-              <a:t> </a:t>
-            </a:r>
-            <a:r>
-              <a:rPr lang="en-GB" sz="2400" spc="-10" dirty="0">
+              <a:t>, NIM</a:t>
+            </a:r>
+            <a:r>
+              <a:rPr sz="2000" spc="-170" dirty="0">
+                <a:latin typeface="Times New Roman"/>
+                <a:cs typeface="Times New Roman"/>
+              </a:rPr>
+              <a:t> </a:t>
+            </a:r>
+            <a:r>
+              <a:rPr sz="2000" dirty="0">
+                <a:latin typeface="Times New Roman"/>
+                <a:cs typeface="Times New Roman"/>
+              </a:rPr>
+              <a:t>A</a:t>
+            </a:r>
+            <a:r>
+              <a:rPr sz="2000" spc="-170" dirty="0">
+                <a:latin typeface="Times New Roman"/>
+                <a:cs typeface="Times New Roman"/>
+              </a:rPr>
+              <a:t> </a:t>
+            </a:r>
+            <a:r>
+              <a:rPr sz="2000" dirty="0">
+                <a:latin typeface="Times New Roman"/>
+                <a:cs typeface="Times New Roman"/>
+              </a:rPr>
+              <a:t>538, 760</a:t>
+            </a:r>
+            <a:r>
+              <a:rPr lang="en-GB" sz="2000" dirty="0">
+                <a:latin typeface="Times New Roman"/>
+                <a:cs typeface="Times New Roman"/>
+              </a:rPr>
+              <a:t> </a:t>
+            </a:r>
+            <a:r>
+              <a:rPr lang="en-GB" sz="2000" spc="-10" dirty="0">
                 <a:latin typeface="Times New Roman"/>
                 <a:cs typeface="Times New Roman"/>
               </a:rPr>
@@ -41842,352 +42017,6 @@
           </a:p>
         </p:txBody>
       </p:sp>
-      <p:grpSp>
-        <p:nvGrpSpPr>
-          <p:cNvPr id="5" name="object 5"/>
-          <p:cNvGrpSpPr/>
-          <p:nvPr/>
-        </p:nvGrpSpPr>
-        <p:grpSpPr>
-          <a:xfrm>
-            <a:off x="1763141" y="911368"/>
-            <a:ext cx="4218305" cy="447675"/>
-            <a:chOff x="1763141" y="911368"/>
-            <a:chExt cx="4218305" cy="447675"/>
-          </a:xfrm>
-        </p:grpSpPr>
-        <p:sp>
-          <p:nvSpPr>
-            <p:cNvPr id="6" name="object 6"/>
-            <p:cNvSpPr/>
-            <p:nvPr/>
-          </p:nvSpPr>
-          <p:spPr>
-            <a:xfrm>
-              <a:off x="1911731" y="1134982"/>
-              <a:ext cx="1811655" cy="0"/>
-            </a:xfrm>
-            <a:custGeom>
-              <a:avLst/>
-              <a:gdLst/>
-              <a:ahLst/>
-              <a:cxnLst/>
-              <a:rect l="l" t="t" r="r" b="b"/>
-              <a:pathLst>
-                <a:path w="1811654">
-                  <a:moveTo>
-                    <a:pt x="1495612" y="0"/>
-                  </a:moveTo>
-                  <a:lnTo>
-                    <a:pt x="1811312" y="0"/>
-                  </a:lnTo>
-                </a:path>
-                <a:path w="1811654">
-                  <a:moveTo>
-                    <a:pt x="0" y="0"/>
-                  </a:moveTo>
-                  <a:lnTo>
-                    <a:pt x="645899" y="0"/>
-                  </a:lnTo>
-                </a:path>
-              </a:pathLst>
-            </a:custGeom>
-            <a:ln w="38100">
-              <a:solidFill>
-                <a:srgbClr val="919191"/>
-              </a:solidFill>
-            </a:ln>
-          </p:spPr>
-          <p:txBody>
-            <a:bodyPr wrap="square" lIns="0" tIns="0" rIns="0" bIns="0" rtlCol="0"/>
-            <a:lstStyle/>
-            <a:p>
-              <a:endParaRPr/>
-            </a:p>
-          </p:txBody>
-        </p:sp>
-        <p:sp>
-          <p:nvSpPr>
-            <p:cNvPr id="7" name="object 7"/>
-            <p:cNvSpPr/>
-            <p:nvPr/>
-          </p:nvSpPr>
-          <p:spPr>
-            <a:xfrm>
-              <a:off x="1763141" y="1051165"/>
-              <a:ext cx="2108835" cy="167640"/>
-            </a:xfrm>
-            <a:custGeom>
-              <a:avLst/>
-              <a:gdLst/>
-              <a:ahLst/>
-              <a:cxnLst/>
-              <a:rect l="l" t="t" r="r" b="b"/>
-              <a:pathLst>
-                <a:path w="2108835" h="167640">
-                  <a:moveTo>
-                    <a:pt x="167640" y="0"/>
-                  </a:moveTo>
-                  <a:lnTo>
-                    <a:pt x="0" y="83820"/>
-                  </a:lnTo>
-                  <a:lnTo>
-                    <a:pt x="167640" y="167640"/>
-                  </a:lnTo>
-                  <a:lnTo>
-                    <a:pt x="167640" y="0"/>
-                  </a:lnTo>
-                  <a:close/>
-                </a:path>
-                <a:path w="2108835" h="167640">
-                  <a:moveTo>
-                    <a:pt x="2108492" y="83820"/>
-                  </a:moveTo>
-                  <a:lnTo>
-                    <a:pt x="1940852" y="0"/>
-                  </a:lnTo>
-                  <a:lnTo>
-                    <a:pt x="1940852" y="167640"/>
-                  </a:lnTo>
-                  <a:lnTo>
-                    <a:pt x="2108492" y="83820"/>
-                  </a:lnTo>
-                  <a:close/>
-                </a:path>
-              </a:pathLst>
-            </a:custGeom>
-            <a:solidFill>
-              <a:srgbClr val="919191"/>
-            </a:solidFill>
-          </p:spPr>
-          <p:txBody>
-            <a:bodyPr wrap="square" lIns="0" tIns="0" rIns="0" bIns="0" rtlCol="0"/>
-            <a:lstStyle/>
-            <a:p>
-              <a:endParaRPr/>
-            </a:p>
-          </p:txBody>
-        </p:sp>
-        <p:sp>
-          <p:nvSpPr>
-            <p:cNvPr id="8" name="object 8"/>
-            <p:cNvSpPr/>
-            <p:nvPr/>
-          </p:nvSpPr>
-          <p:spPr>
-            <a:xfrm>
-              <a:off x="4021215" y="1116681"/>
-              <a:ext cx="1811655" cy="0"/>
-            </a:xfrm>
-            <a:custGeom>
-              <a:avLst/>
-              <a:gdLst/>
-              <a:ahLst/>
-              <a:cxnLst/>
-              <a:rect l="l" t="t" r="r" b="b"/>
-              <a:pathLst>
-                <a:path w="1811654">
-                  <a:moveTo>
-                    <a:pt x="0" y="0"/>
-                  </a:moveTo>
-                  <a:lnTo>
-                    <a:pt x="565683" y="0"/>
-                  </a:lnTo>
-                </a:path>
-                <a:path w="1811654">
-                  <a:moveTo>
-                    <a:pt x="1245881" y="0"/>
-                  </a:moveTo>
-                  <a:lnTo>
-                    <a:pt x="1811566" y="0"/>
-                  </a:lnTo>
-                </a:path>
-              </a:pathLst>
-            </a:custGeom>
-            <a:ln w="38100">
-              <a:solidFill>
-                <a:srgbClr val="919191"/>
-              </a:solidFill>
-            </a:ln>
-          </p:spPr>
-          <p:txBody>
-            <a:bodyPr wrap="square" lIns="0" tIns="0" rIns="0" bIns="0" rtlCol="0"/>
-            <a:lstStyle/>
-            <a:p>
-              <a:endParaRPr/>
-            </a:p>
-          </p:txBody>
-        </p:sp>
-        <p:sp>
-          <p:nvSpPr>
-            <p:cNvPr id="9" name="object 9"/>
-            <p:cNvSpPr/>
-            <p:nvPr/>
-          </p:nvSpPr>
-          <p:spPr>
-            <a:xfrm>
-              <a:off x="3872623" y="1032865"/>
-              <a:ext cx="2108835" cy="167640"/>
-            </a:xfrm>
-            <a:custGeom>
-              <a:avLst/>
-              <a:gdLst/>
-              <a:ahLst/>
-              <a:cxnLst/>
-              <a:rect l="l" t="t" r="r" b="b"/>
-              <a:pathLst>
-                <a:path w="2108835" h="167640">
-                  <a:moveTo>
-                    <a:pt x="167640" y="0"/>
-                  </a:moveTo>
-                  <a:lnTo>
-                    <a:pt x="0" y="83820"/>
-                  </a:lnTo>
-                  <a:lnTo>
-                    <a:pt x="167640" y="167640"/>
-                  </a:lnTo>
-                  <a:lnTo>
-                    <a:pt x="167640" y="0"/>
-                  </a:lnTo>
-                  <a:close/>
-                </a:path>
-                <a:path w="2108835" h="167640">
-                  <a:moveTo>
-                    <a:pt x="2108746" y="83820"/>
-                  </a:moveTo>
-                  <a:lnTo>
-                    <a:pt x="1941106" y="0"/>
-                  </a:lnTo>
-                  <a:lnTo>
-                    <a:pt x="1941106" y="167640"/>
-                  </a:lnTo>
-                  <a:lnTo>
-                    <a:pt x="2108746" y="83820"/>
-                  </a:lnTo>
-                  <a:close/>
-                </a:path>
-              </a:pathLst>
-            </a:custGeom>
-            <a:solidFill>
-              <a:srgbClr val="919191"/>
-            </a:solidFill>
-          </p:spPr>
-          <p:txBody>
-            <a:bodyPr wrap="square" lIns="0" tIns="0" rIns="0" bIns="0" rtlCol="0"/>
-            <a:lstStyle/>
-            <a:p>
-              <a:endParaRPr/>
-            </a:p>
-          </p:txBody>
-        </p:sp>
-        <p:sp>
-          <p:nvSpPr>
-            <p:cNvPr id="10" name="object 10"/>
-            <p:cNvSpPr/>
-            <p:nvPr/>
-          </p:nvSpPr>
-          <p:spPr>
-            <a:xfrm>
-              <a:off x="2557630" y="911368"/>
-              <a:ext cx="850265" cy="447675"/>
-            </a:xfrm>
-            <a:custGeom>
-              <a:avLst/>
-              <a:gdLst/>
-              <a:ahLst/>
-              <a:cxnLst/>
-              <a:rect l="l" t="t" r="r" b="b"/>
-              <a:pathLst>
-                <a:path w="850264" h="447675">
-                  <a:moveTo>
-                    <a:pt x="0" y="0"/>
-                  </a:moveTo>
-                  <a:lnTo>
-                    <a:pt x="849713" y="0"/>
-                  </a:lnTo>
-                  <a:lnTo>
-                    <a:pt x="849713" y="447227"/>
-                  </a:lnTo>
-                  <a:lnTo>
-                    <a:pt x="0" y="447227"/>
-                  </a:lnTo>
-                  <a:lnTo>
-                    <a:pt x="0" y="0"/>
-                  </a:lnTo>
-                  <a:close/>
-                </a:path>
-              </a:pathLst>
-            </a:custGeom>
-            <a:solidFill>
-              <a:srgbClr val="FFFFFF"/>
-            </a:solidFill>
-          </p:spPr>
-          <p:txBody>
-            <a:bodyPr wrap="square" lIns="0" tIns="0" rIns="0" bIns="0" rtlCol="0"/>
-            <a:lstStyle/>
-            <a:p>
-              <a:endParaRPr/>
-            </a:p>
-          </p:txBody>
-        </p:sp>
-      </p:grpSp>
-      <p:sp>
-        <p:nvSpPr>
-          <p:cNvPr id="11" name="object 11"/>
-          <p:cNvSpPr txBox="1"/>
-          <p:nvPr/>
-        </p:nvSpPr>
-        <p:spPr>
-          <a:xfrm>
-            <a:off x="2654300" y="927100"/>
-            <a:ext cx="703580" cy="391160"/>
-          </a:xfrm>
-          <a:prstGeom prst="rect">
-            <a:avLst/>
-          </a:prstGeom>
-        </p:spPr>
-        <p:txBody>
-          <a:bodyPr vert="horz" wrap="square" lIns="0" tIns="12700" rIns="0" bIns="0" rtlCol="0">
-            <a:spAutoFit/>
-          </a:bodyPr>
-          <a:lstStyle/>
-          <a:p>
-            <a:pPr marL="12700">
-              <a:lnSpc>
-                <a:spcPct val="100000"/>
-              </a:lnSpc>
-              <a:spcBef>
-                <a:spcPts val="100"/>
-              </a:spcBef>
-            </a:pPr>
-            <a:r>
-              <a:rPr sz="2400" dirty="0">
-                <a:latin typeface="Arial MT"/>
-                <a:cs typeface="Arial MT"/>
-              </a:rPr>
-              <a:t>28</a:t>
-            </a:r>
-            <a:r>
-              <a:rPr sz="2400" spc="-30" dirty="0">
-                <a:latin typeface="Arial MT"/>
-                <a:cs typeface="Arial MT"/>
-              </a:rPr>
-              <a:t> </a:t>
-            </a:r>
-            <a:r>
-              <a:rPr sz="2400" spc="-50" dirty="0">
-                <a:latin typeface="Arial MT"/>
-                <a:cs typeface="Arial MT"/>
-              </a:rPr>
-              <a:t>m</a:t>
-            </a:r>
-            <a:endParaRPr sz="2400">
-              <a:latin typeface="Arial MT"/>
-              <a:cs typeface="Arial MT"/>
-            </a:endParaRPr>
-          </a:p>
-        </p:txBody>
-      </p:sp>
       <p:sp>
         <p:nvSpPr>
           <p:cNvPr id="12" name="object 12"/>
@@ -42246,8 +42075,8 @@
         </p:nvSpPr>
         <p:spPr>
           <a:xfrm>
-            <a:off x="4686300" y="901700"/>
-            <a:ext cx="534035" cy="391160"/>
+            <a:off x="4468874" y="1264586"/>
+            <a:ext cx="1172848" cy="382156"/>
           </a:xfrm>
           <a:prstGeom prst="rect">
             <a:avLst/>
@@ -42268,11 +42097,11 @@
               </a:spcBef>
             </a:pPr>
             <a:r>
-              <a:rPr sz="2400" dirty="0">
+              <a:rPr lang="en-US" sz="2400" dirty="0">
                 <a:latin typeface="Arial MT"/>
                 <a:cs typeface="Arial MT"/>
               </a:rPr>
-              <a:t>2</a:t>
+              <a:t>30</a:t>
             </a:r>
             <a:r>
               <a:rPr sz="2400" spc="-15" dirty="0">
@@ -42288,7 +42117,7 @@
               </a:rPr>
               <a:t>m</a:t>
             </a:r>
-            <a:endParaRPr sz="2400">
+            <a:endParaRPr sz="2400" dirty="0">
               <a:latin typeface="Arial MT"/>
               <a:cs typeface="Arial MT"/>
             </a:endParaRPr>
@@ -42522,7 +42351,7 @@
               </a:rPr>
               <a:t>m</a:t>
             </a:r>
-            <a:endParaRPr sz="2400">
+            <a:endParaRPr sz="2400" dirty="0">
               <a:latin typeface="Arial MT"/>
               <a:cs typeface="Arial MT"/>
             </a:endParaRPr>
@@ -42531,230 +42360,13 @@
       </p:sp>
       <p:sp>
         <p:nvSpPr>
-          <p:cNvPr id="19" name="object 19"/>
-          <p:cNvSpPr txBox="1"/>
-          <p:nvPr/>
-        </p:nvSpPr>
-        <p:spPr>
-          <a:xfrm>
-            <a:off x="2255515" y="967035"/>
-            <a:ext cx="565150" cy="290830"/>
-          </a:xfrm>
-          <a:prstGeom prst="rect">
-            <a:avLst/>
-          </a:prstGeom>
-        </p:spPr>
-        <p:txBody>
-          <a:bodyPr vert="vert270" wrap="square" lIns="0" tIns="0" rIns="0" bIns="0" rtlCol="0">
-            <a:spAutoFit/>
-          </a:bodyPr>
-          <a:lstStyle/>
-          <a:p>
-            <a:pPr marL="12700">
-              <a:lnSpc>
-                <a:spcPts val="4300"/>
-              </a:lnSpc>
-            </a:pPr>
-            <a:r>
-              <a:rPr sz="3800" spc="-50" dirty="0">
-                <a:latin typeface="Arial MT"/>
-                <a:cs typeface="Arial MT"/>
-              </a:rPr>
-              <a:t>≈</a:t>
-            </a:r>
-            <a:endParaRPr sz="3800">
-              <a:latin typeface="Arial MT"/>
-              <a:cs typeface="Arial MT"/>
-            </a:endParaRPr>
-          </a:p>
-        </p:txBody>
-      </p:sp>
-      <p:grpSp>
-        <p:nvGrpSpPr>
-          <p:cNvPr id="20" name="object 20"/>
-          <p:cNvGrpSpPr/>
-          <p:nvPr/>
-        </p:nvGrpSpPr>
-        <p:grpSpPr>
-          <a:xfrm>
-            <a:off x="8071938" y="893067"/>
-            <a:ext cx="2108835" cy="447675"/>
-            <a:chOff x="8071938" y="893067"/>
-            <a:chExt cx="2108835" cy="447675"/>
-          </a:xfrm>
-        </p:grpSpPr>
-        <p:sp>
-          <p:nvSpPr>
-            <p:cNvPr id="21" name="object 21"/>
-            <p:cNvSpPr/>
-            <p:nvPr/>
-          </p:nvSpPr>
-          <p:spPr>
-            <a:xfrm>
-              <a:off x="8220528" y="1132933"/>
-              <a:ext cx="1811655" cy="0"/>
-            </a:xfrm>
-            <a:custGeom>
-              <a:avLst/>
-              <a:gdLst/>
-              <a:ahLst/>
-              <a:cxnLst/>
-              <a:rect l="l" t="t" r="r" b="b"/>
-              <a:pathLst>
-                <a:path w="1811654">
-                  <a:moveTo>
-                    <a:pt x="0" y="0"/>
-                  </a:moveTo>
-                  <a:lnTo>
-                    <a:pt x="580029" y="0"/>
-                  </a:lnTo>
-                </a:path>
-                <a:path w="1811654">
-                  <a:moveTo>
-                    <a:pt x="1514426" y="0"/>
-                  </a:moveTo>
-                  <a:lnTo>
-                    <a:pt x="1811312" y="0"/>
-                  </a:lnTo>
-                </a:path>
-              </a:pathLst>
-            </a:custGeom>
-            <a:ln w="38100">
-              <a:solidFill>
-                <a:srgbClr val="919191"/>
-              </a:solidFill>
-            </a:ln>
-          </p:spPr>
-          <p:txBody>
-            <a:bodyPr wrap="square" lIns="0" tIns="0" rIns="0" bIns="0" rtlCol="0"/>
-            <a:lstStyle/>
-            <a:p>
-              <a:endParaRPr/>
-            </a:p>
-          </p:txBody>
-        </p:sp>
-        <p:sp>
-          <p:nvSpPr>
-            <p:cNvPr id="22" name="object 22"/>
-            <p:cNvSpPr/>
-            <p:nvPr/>
-          </p:nvSpPr>
-          <p:spPr>
-            <a:xfrm>
-              <a:off x="8071929" y="1049121"/>
-              <a:ext cx="2108835" cy="167640"/>
-            </a:xfrm>
-            <a:custGeom>
-              <a:avLst/>
-              <a:gdLst/>
-              <a:ahLst/>
-              <a:cxnLst/>
-              <a:rect l="l" t="t" r="r" b="b"/>
-              <a:pathLst>
-                <a:path w="2108834" h="167640">
-                  <a:moveTo>
-                    <a:pt x="167640" y="0"/>
-                  </a:moveTo>
-                  <a:lnTo>
-                    <a:pt x="0" y="83820"/>
-                  </a:lnTo>
-                  <a:lnTo>
-                    <a:pt x="167640" y="167640"/>
-                  </a:lnTo>
-                  <a:lnTo>
-                    <a:pt x="167640" y="0"/>
-                  </a:lnTo>
-                  <a:close/>
-                </a:path>
-                <a:path w="2108834" h="167640">
-                  <a:moveTo>
-                    <a:pt x="2108492" y="83820"/>
-                  </a:moveTo>
-                  <a:lnTo>
-                    <a:pt x="1940852" y="0"/>
-                  </a:lnTo>
-                  <a:lnTo>
-                    <a:pt x="1940852" y="167640"/>
-                  </a:lnTo>
-                  <a:lnTo>
-                    <a:pt x="2108492" y="83820"/>
-                  </a:lnTo>
-                  <a:close/>
-                </a:path>
-              </a:pathLst>
-            </a:custGeom>
-            <a:solidFill>
-              <a:srgbClr val="919191"/>
-            </a:solidFill>
-          </p:spPr>
-          <p:txBody>
-            <a:bodyPr wrap="square" lIns="0" tIns="0" rIns="0" bIns="0" rtlCol="0"/>
-            <a:lstStyle/>
-            <a:p>
-              <a:endParaRPr/>
-            </a:p>
-          </p:txBody>
-        </p:sp>
-        <p:sp>
-          <p:nvSpPr>
-            <p:cNvPr id="23" name="object 23"/>
-            <p:cNvSpPr/>
-            <p:nvPr/>
-          </p:nvSpPr>
-          <p:spPr>
-            <a:xfrm>
-              <a:off x="8800557" y="893067"/>
-              <a:ext cx="934719" cy="447675"/>
-            </a:xfrm>
-            <a:custGeom>
-              <a:avLst/>
-              <a:gdLst/>
-              <a:ahLst/>
-              <a:cxnLst/>
-              <a:rect l="l" t="t" r="r" b="b"/>
-              <a:pathLst>
-                <a:path w="934720" h="447675">
-                  <a:moveTo>
-                    <a:pt x="0" y="0"/>
-                  </a:moveTo>
-                  <a:lnTo>
-                    <a:pt x="934397" y="0"/>
-                  </a:lnTo>
-                  <a:lnTo>
-                    <a:pt x="934397" y="447227"/>
-                  </a:lnTo>
-                  <a:lnTo>
-                    <a:pt x="0" y="447227"/>
-                  </a:lnTo>
-                  <a:lnTo>
-                    <a:pt x="0" y="0"/>
-                  </a:lnTo>
-                  <a:close/>
-                </a:path>
-              </a:pathLst>
-            </a:custGeom>
-            <a:solidFill>
-              <a:srgbClr val="FFFFFF"/>
-            </a:solidFill>
-          </p:spPr>
-          <p:txBody>
-            <a:bodyPr wrap="square" lIns="0" tIns="0" rIns="0" bIns="0" rtlCol="0"/>
-            <a:lstStyle/>
-            <a:p>
-              <a:endParaRPr/>
-            </a:p>
-          </p:txBody>
-        </p:sp>
-      </p:grpSp>
-      <p:sp>
-        <p:nvSpPr>
           <p:cNvPr id="24" name="object 24"/>
           <p:cNvSpPr txBox="1"/>
           <p:nvPr/>
         </p:nvSpPr>
         <p:spPr>
           <a:xfrm>
-            <a:off x="8902700" y="901700"/>
+            <a:off x="8618220" y="1310390"/>
             <a:ext cx="703580" cy="391160"/>
           </a:xfrm>
           <a:prstGeom prst="rect">
@@ -42796,47 +42408,7 @@
               </a:rPr>
               <a:t>m</a:t>
             </a:r>
-            <a:endParaRPr sz="2400">
-              <a:latin typeface="Arial MT"/>
-              <a:cs typeface="Arial MT"/>
-            </a:endParaRPr>
-          </a:p>
-        </p:txBody>
-      </p:sp>
-      <p:sp>
-        <p:nvSpPr>
-          <p:cNvPr id="25" name="object 25"/>
-          <p:cNvSpPr txBox="1"/>
-          <p:nvPr/>
-        </p:nvSpPr>
-        <p:spPr>
-          <a:xfrm>
-            <a:off x="8478515" y="941635"/>
-            <a:ext cx="565150" cy="290830"/>
-          </a:xfrm>
-          <a:prstGeom prst="rect">
-            <a:avLst/>
-          </a:prstGeom>
-        </p:spPr>
-        <p:txBody>
-          <a:bodyPr vert="vert270" wrap="square" lIns="0" tIns="0" rIns="0" bIns="0" rtlCol="0">
-            <a:spAutoFit/>
-          </a:bodyPr>
-          <a:lstStyle/>
-          <a:p>
-            <a:pPr marL="12700">
-              <a:lnSpc>
-                <a:spcPts val="4300"/>
-              </a:lnSpc>
-            </a:pPr>
-            <a:r>
-              <a:rPr sz="3800" spc="-50" dirty="0">
-                <a:latin typeface="Arial MT"/>
-                <a:cs typeface="Arial MT"/>
-              </a:rPr>
-              <a:t>≈</a:t>
-            </a:r>
-            <a:endParaRPr sz="3800">
+            <a:endParaRPr sz="2400" dirty="0">
               <a:latin typeface="Arial MT"/>
               <a:cs typeface="Arial MT"/>
             </a:endParaRPr>
@@ -42851,7 +42423,7 @@
         </p:nvSpPr>
         <p:spPr>
           <a:xfrm>
-            <a:off x="9766300" y="1295400"/>
+            <a:off x="10410468" y="1749025"/>
             <a:ext cx="1279525" cy="391160"/>
           </a:xfrm>
           <a:prstGeom prst="rect">
@@ -42893,7 +42465,7 @@
               </a:rPr>
               <a:t>plane</a:t>
             </a:r>
-            <a:endParaRPr sz="2400">
+            <a:endParaRPr sz="2400" dirty="0">
               <a:latin typeface="Arial MT"/>
               <a:cs typeface="Arial MT"/>
             </a:endParaRPr>
@@ -43152,7 +42724,7 @@
         </p:nvSpPr>
         <p:spPr>
           <a:xfrm>
-            <a:off x="5549900" y="2910840"/>
+            <a:off x="5549900" y="3063240"/>
             <a:ext cx="754380" cy="746760"/>
           </a:xfrm>
           <a:prstGeom prst="rect">
@@ -43180,7 +42752,7 @@
               </a:rPr>
               <a:t>87.8°</a:t>
             </a:r>
-            <a:endParaRPr sz="2400">
+            <a:endParaRPr sz="2400" dirty="0">
               <a:latin typeface="Arial MT"/>
               <a:cs typeface="Arial MT"/>
             </a:endParaRPr>
@@ -43198,7 +42770,7 @@
               </a:rPr>
               <a:t>down</a:t>
             </a:r>
-            <a:endParaRPr sz="2400">
+            <a:endParaRPr sz="2400" dirty="0">
               <a:latin typeface="Arial MT"/>
               <a:cs typeface="Arial MT"/>
             </a:endParaRPr>
@@ -43213,7 +42785,7 @@
         </p:nvSpPr>
         <p:spPr>
           <a:xfrm>
-            <a:off x="6946900" y="2910840"/>
+            <a:off x="6946900" y="3139440"/>
             <a:ext cx="2329180" cy="746760"/>
           </a:xfrm>
           <a:prstGeom prst="rect">
@@ -43269,7 +42841,7 @@
               </a:rPr>
               <a:t>=87.1°</a:t>
             </a:r>
-            <a:endParaRPr sz="2400">
+            <a:endParaRPr sz="2400" dirty="0">
               <a:latin typeface="Arial MT"/>
               <a:cs typeface="Arial MT"/>
             </a:endParaRPr>
@@ -43287,7 +42859,7 @@
               </a:rPr>
               <a:t>up</a:t>
             </a:r>
-            <a:endParaRPr sz="2400">
+            <a:endParaRPr sz="2400" dirty="0">
               <a:latin typeface="Arial MT"/>
               <a:cs typeface="Arial MT"/>
             </a:endParaRPr>
@@ -43372,173 +42944,362 @@
           </a:p>
         </p:txBody>
       </p:sp>
-      <p:grpSp>
-        <p:nvGrpSpPr>
-          <p:cNvPr id="44" name="Group 43">
+      <p:cxnSp>
+        <p:nvCxnSpPr>
+          <p:cNvPr id="27" name="Straight Arrow Connector 26">
             <a:extLst>
               <a:ext uri="{FF2B5EF4-FFF2-40B4-BE49-F238E27FC236}">
-                <a16:creationId xmlns:a16="http://schemas.microsoft.com/office/drawing/2014/main" id="{0EBB95A7-5C62-4C67-9A4C-CDF91FF93FC1}"/>
+                <a16:creationId xmlns:a16="http://schemas.microsoft.com/office/drawing/2014/main" id="{33A96917-19B0-494D-9461-DFADCE589FC5}"/>
               </a:ext>
             </a:extLst>
           </p:cNvPr>
-          <p:cNvGrpSpPr/>
+          <p:cNvCxnSpPr>
+            <a:cxnSpLocks/>
+          </p:cNvCxnSpPr>
           <p:nvPr/>
-        </p:nvGrpSpPr>
-        <p:grpSpPr>
+        </p:nvCxnSpPr>
+        <p:spPr>
           <a:xfrm>
-            <a:off x="3006090" y="1720936"/>
-            <a:ext cx="2165350" cy="785495"/>
-            <a:chOff x="4586898" y="4819689"/>
-            <a:chExt cx="2165350" cy="785495"/>
+            <a:off x="5267618" y="1497686"/>
+            <a:ext cx="2800120" cy="36121"/>
           </a:xfrm>
-        </p:grpSpPr>
-        <p:sp>
-          <p:nvSpPr>
-            <p:cNvPr id="42" name="object 31">
-              <a:extLst>
-                <a:ext uri="{FF2B5EF4-FFF2-40B4-BE49-F238E27FC236}">
-                  <a16:creationId xmlns:a16="http://schemas.microsoft.com/office/drawing/2014/main" id="{4A8ABDD8-1FFC-4C9F-8AF0-E472EE0F1C3B}"/>
-                </a:ext>
-              </a:extLst>
-            </p:cNvPr>
-            <p:cNvSpPr/>
-            <p:nvPr/>
-          </p:nvSpPr>
-          <p:spPr>
-            <a:xfrm>
-              <a:off x="4586898" y="4819689"/>
-              <a:ext cx="2165350" cy="785495"/>
-            </a:xfrm>
-            <a:custGeom>
-              <a:avLst/>
-              <a:gdLst/>
-              <a:ahLst/>
-              <a:cxnLst/>
-              <a:rect l="l" t="t" r="r" b="b"/>
-              <a:pathLst>
-                <a:path w="2165350" h="785494">
-                  <a:moveTo>
-                    <a:pt x="2092458" y="0"/>
-                  </a:moveTo>
-                  <a:lnTo>
-                    <a:pt x="0" y="344065"/>
-                  </a:lnTo>
-                  <a:lnTo>
-                    <a:pt x="72563" y="785369"/>
-                  </a:lnTo>
-                  <a:lnTo>
-                    <a:pt x="2165022" y="441302"/>
-                  </a:lnTo>
-                  <a:lnTo>
-                    <a:pt x="2092458" y="0"/>
-                  </a:lnTo>
-                  <a:close/>
-                </a:path>
-              </a:pathLst>
-            </a:custGeom>
-            <a:solidFill>
-              <a:srgbClr val="FFFC79"/>
-            </a:solidFill>
-          </p:spPr>
-          <p:txBody>
-            <a:bodyPr wrap="square" lIns="0" tIns="0" rIns="0" bIns="0" rtlCol="0"/>
-            <a:lstStyle/>
-            <a:p>
-              <a:endParaRPr/>
-            </a:p>
-          </p:txBody>
-        </p:sp>
-        <p:sp>
-          <p:nvSpPr>
-            <p:cNvPr id="43" name="object 32">
-              <a:extLst>
-                <a:ext uri="{FF2B5EF4-FFF2-40B4-BE49-F238E27FC236}">
-                  <a16:creationId xmlns:a16="http://schemas.microsoft.com/office/drawing/2014/main" id="{52DC7BA0-4B23-4850-BFC4-326C6911CAB5}"/>
-                </a:ext>
-              </a:extLst>
-            </p:cNvPr>
-            <p:cNvSpPr txBox="1"/>
-            <p:nvPr/>
-          </p:nvSpPr>
-          <p:spPr>
-            <a:xfrm rot="21060000">
-              <a:off x="4706870" y="5070492"/>
-              <a:ext cx="1974388" cy="304800"/>
-            </a:xfrm>
-            <a:prstGeom prst="rect">
-              <a:avLst/>
-            </a:prstGeom>
-          </p:spPr>
-          <p:txBody>
-            <a:bodyPr vert="horz" wrap="square" lIns="0" tIns="0" rIns="0" bIns="0" rtlCol="0">
-              <a:spAutoFit/>
-            </a:bodyPr>
-            <a:lstStyle/>
-            <a:p>
-              <a:pPr>
-                <a:lnSpc>
-                  <a:spcPts val="2400"/>
-                </a:lnSpc>
-              </a:pPr>
-              <a:r>
-                <a:rPr sz="2400" spc="-30" dirty="0">
-                  <a:solidFill>
-                    <a:srgbClr val="FF2600"/>
-                  </a:solidFill>
-                  <a:latin typeface="Arial MT"/>
-                  <a:cs typeface="Arial MT"/>
-                </a:rPr>
-                <a:t>Hea</a:t>
-              </a:r>
-              <a:r>
-                <a:rPr sz="3600" spc="-44" baseline="1157" dirty="0">
-                  <a:solidFill>
-                    <a:srgbClr val="FF2600"/>
-                  </a:solidFill>
-                  <a:latin typeface="Arial MT"/>
-                  <a:cs typeface="Arial MT"/>
-                </a:rPr>
-                <a:t>t</a:t>
-              </a:r>
-              <a:r>
-                <a:rPr sz="3600" spc="-202" baseline="1157" dirty="0">
-                  <a:solidFill>
-                    <a:srgbClr val="FF2600"/>
-                  </a:solidFill>
-                  <a:latin typeface="Arial MT"/>
-                  <a:cs typeface="Arial MT"/>
-                </a:rPr>
-                <a:t> </a:t>
-              </a:r>
-              <a:r>
-                <a:rPr sz="3600" spc="-15" baseline="1157" dirty="0">
-                  <a:solidFill>
-                    <a:srgbClr val="FF2600"/>
-                  </a:solidFill>
-                  <a:latin typeface="Arial MT"/>
-                  <a:cs typeface="Arial MT"/>
-                </a:rPr>
-                <a:t>Absorb</a:t>
-              </a:r>
-              <a:r>
-                <a:rPr sz="3600" spc="-15" baseline="2314" dirty="0">
-                  <a:solidFill>
-                    <a:srgbClr val="FF2600"/>
-                  </a:solidFill>
-                  <a:latin typeface="Arial MT"/>
-                  <a:cs typeface="Arial MT"/>
-                </a:rPr>
-                <a:t>er</a:t>
-              </a:r>
-              <a:endParaRPr sz="3600" baseline="2314" dirty="0">
+          <a:prstGeom prst="straightConnector1">
+            <a:avLst/>
+          </a:prstGeom>
+          <a:ln w="22225">
+            <a:tailEnd type="triangle"/>
+          </a:ln>
+        </p:spPr>
+        <p:style>
+          <a:lnRef idx="1">
+            <a:schemeClr val="accent1"/>
+          </a:lnRef>
+          <a:fillRef idx="0">
+            <a:schemeClr val="accent1"/>
+          </a:fillRef>
+          <a:effectRef idx="0">
+            <a:schemeClr val="accent1"/>
+          </a:effectRef>
+          <a:fontRef idx="minor">
+            <a:schemeClr val="tx1"/>
+          </a:fontRef>
+        </p:style>
+      </p:cxnSp>
+      <p:cxnSp>
+        <p:nvCxnSpPr>
+          <p:cNvPr id="50" name="Straight Arrow Connector 49">
+            <a:extLst>
+              <a:ext uri="{FF2B5EF4-FFF2-40B4-BE49-F238E27FC236}">
+                <a16:creationId xmlns:a16="http://schemas.microsoft.com/office/drawing/2014/main" id="{FF25B038-A5F2-4F62-B30D-3A817859BC24}"/>
+              </a:ext>
+            </a:extLst>
+          </p:cNvPr>
+          <p:cNvCxnSpPr>
+            <a:cxnSpLocks/>
+          </p:cNvCxnSpPr>
+          <p:nvPr/>
+        </p:nvCxnSpPr>
+        <p:spPr>
+          <a:xfrm flipH="1" flipV="1">
+            <a:off x="1820057" y="1447800"/>
+            <a:ext cx="2548743" cy="15889"/>
+          </a:xfrm>
+          <a:prstGeom prst="straightConnector1">
+            <a:avLst/>
+          </a:prstGeom>
+          <a:ln w="22225">
+            <a:tailEnd type="triangle"/>
+          </a:ln>
+        </p:spPr>
+        <p:style>
+          <a:lnRef idx="1">
+            <a:schemeClr val="accent1"/>
+          </a:lnRef>
+          <a:fillRef idx="0">
+            <a:schemeClr val="accent1"/>
+          </a:fillRef>
+          <a:effectRef idx="0">
+            <a:schemeClr val="accent1"/>
+          </a:effectRef>
+          <a:fontRef idx="minor">
+            <a:schemeClr val="tx1"/>
+          </a:fontRef>
+        </p:style>
+      </p:cxnSp>
+      <p:cxnSp>
+        <p:nvCxnSpPr>
+          <p:cNvPr id="54" name="Straight Arrow Connector 53">
+            <a:extLst>
+              <a:ext uri="{FF2B5EF4-FFF2-40B4-BE49-F238E27FC236}">
+                <a16:creationId xmlns:a16="http://schemas.microsoft.com/office/drawing/2014/main" id="{0E643E90-2103-4781-B121-0182F051F47D}"/>
+              </a:ext>
+            </a:extLst>
+          </p:cNvPr>
+          <p:cNvCxnSpPr>
+            <a:cxnSpLocks/>
+          </p:cNvCxnSpPr>
+          <p:nvPr/>
+        </p:nvCxnSpPr>
+        <p:spPr>
+          <a:xfrm>
+            <a:off x="9413383" y="1559505"/>
+            <a:ext cx="482905" cy="579"/>
+          </a:xfrm>
+          <a:prstGeom prst="straightConnector1">
+            <a:avLst/>
+          </a:prstGeom>
+          <a:ln w="22225">
+            <a:tailEnd type="triangle"/>
+          </a:ln>
+        </p:spPr>
+        <p:style>
+          <a:lnRef idx="1">
+            <a:schemeClr val="accent1"/>
+          </a:lnRef>
+          <a:fillRef idx="0">
+            <a:schemeClr val="accent1"/>
+          </a:fillRef>
+          <a:effectRef idx="0">
+            <a:schemeClr val="accent1"/>
+          </a:effectRef>
+          <a:fontRef idx="minor">
+            <a:schemeClr val="tx1"/>
+          </a:fontRef>
+        </p:style>
+      </p:cxnSp>
+      <p:cxnSp>
+        <p:nvCxnSpPr>
+          <p:cNvPr id="61" name="Straight Arrow Connector 60">
+            <a:extLst>
+              <a:ext uri="{FF2B5EF4-FFF2-40B4-BE49-F238E27FC236}">
+                <a16:creationId xmlns:a16="http://schemas.microsoft.com/office/drawing/2014/main" id="{BB406A2A-8CE9-4B4B-8C0A-9F3535E909BB}"/>
+              </a:ext>
+            </a:extLst>
+          </p:cNvPr>
+          <p:cNvCxnSpPr>
+            <a:cxnSpLocks/>
+          </p:cNvCxnSpPr>
+          <p:nvPr/>
+        </p:nvCxnSpPr>
+        <p:spPr>
+          <a:xfrm flipH="1">
+            <a:off x="8111490" y="1548811"/>
+            <a:ext cx="448310" cy="0"/>
+          </a:xfrm>
+          <a:prstGeom prst="straightConnector1">
+            <a:avLst/>
+          </a:prstGeom>
+          <a:ln w="22225">
+            <a:tailEnd type="triangle"/>
+          </a:ln>
+        </p:spPr>
+        <p:style>
+          <a:lnRef idx="1">
+            <a:schemeClr val="accent1"/>
+          </a:lnRef>
+          <a:fillRef idx="0">
+            <a:schemeClr val="accent1"/>
+          </a:fillRef>
+          <a:effectRef idx="0">
+            <a:schemeClr val="accent1"/>
+          </a:effectRef>
+          <a:fontRef idx="minor">
+            <a:schemeClr val="tx1"/>
+          </a:fontRef>
+        </p:style>
+      </p:cxnSp>
+      <p:pic>
+        <p:nvPicPr>
+          <p:cNvPr id="64" name="Picture 63">
+            <a:extLst>
+              <a:ext uri="{FF2B5EF4-FFF2-40B4-BE49-F238E27FC236}">
+                <a16:creationId xmlns:a16="http://schemas.microsoft.com/office/drawing/2014/main" id="{07FF7CBE-E712-4116-A2E4-EB806809C780}"/>
+              </a:ext>
+            </a:extLst>
+          </p:cNvPr>
+          <p:cNvPicPr>
+            <a:picLocks noChangeAspect="1"/>
+          </p:cNvPicPr>
+          <p:nvPr/>
+        </p:nvPicPr>
+        <p:blipFill>
+          <a:blip r:embed="rId4"/>
+          <a:stretch>
+            <a:fillRect/>
+          </a:stretch>
+        </p:blipFill>
+        <p:spPr>
+          <a:xfrm>
+            <a:off x="1438039" y="5084726"/>
+            <a:ext cx="4373070" cy="3883465"/>
+          </a:xfrm>
+          <a:prstGeom prst="rect">
+            <a:avLst/>
+          </a:prstGeom>
+        </p:spPr>
+      </p:pic>
+      <p:pic>
+        <p:nvPicPr>
+          <p:cNvPr id="65" name="Picture 64">
+            <a:extLst>
+              <a:ext uri="{FF2B5EF4-FFF2-40B4-BE49-F238E27FC236}">
+                <a16:creationId xmlns:a16="http://schemas.microsoft.com/office/drawing/2014/main" id="{82AE5FE5-85CA-41FC-853B-9D2C9ABAE6D6}"/>
+              </a:ext>
+            </a:extLst>
+          </p:cNvPr>
+          <p:cNvPicPr>
+            <a:picLocks noChangeAspect="1"/>
+          </p:cNvPicPr>
+          <p:nvPr/>
+        </p:nvPicPr>
+        <p:blipFill>
+          <a:blip r:embed="rId5"/>
+          <a:stretch>
+            <a:fillRect/>
+          </a:stretch>
+        </p:blipFill>
+        <p:spPr>
+          <a:xfrm>
+            <a:off x="6825218" y="6246743"/>
+            <a:ext cx="3684172" cy="921043"/>
+          </a:xfrm>
+          <a:prstGeom prst="rect">
+            <a:avLst/>
+          </a:prstGeom>
+        </p:spPr>
+      </p:pic>
+      <p:sp>
+        <p:nvSpPr>
+          <p:cNvPr id="66" name="Rectangle 65">
+            <a:extLst>
+              <a:ext uri="{FF2B5EF4-FFF2-40B4-BE49-F238E27FC236}">
+                <a16:creationId xmlns:a16="http://schemas.microsoft.com/office/drawing/2014/main" id="{94B22CB7-1FDB-4833-8C8D-F0B28C395760}"/>
+              </a:ext>
+            </a:extLst>
+          </p:cNvPr>
+          <p:cNvSpPr/>
+          <p:nvPr/>
+        </p:nvSpPr>
+        <p:spPr>
+          <a:xfrm>
+            <a:off x="19065" y="18782"/>
+            <a:ext cx="4750018" cy="369332"/>
+          </a:xfrm>
+          <a:prstGeom prst="rect">
+            <a:avLst/>
+          </a:prstGeom>
+        </p:spPr>
+        <p:txBody>
+          <a:bodyPr wrap="none">
+            <a:spAutoFit/>
+          </a:bodyPr>
+          <a:lstStyle/>
+          <a:p>
+            <a:r>
+              <a:rPr lang="en-GB" dirty="0"/>
+              <a:t>06_FVLSPGM1000eVc2M2WithWithout.ows</a:t>
+            </a:r>
+          </a:p>
+        </p:txBody>
+      </p:sp>
+      <p:sp>
+        <p:nvSpPr>
+          <p:cNvPr id="67" name="object 32">
+            <a:extLst>
+              <a:ext uri="{FF2B5EF4-FFF2-40B4-BE49-F238E27FC236}">
+                <a16:creationId xmlns:a16="http://schemas.microsoft.com/office/drawing/2014/main" id="{5D0386A3-7EAA-4F95-8F2E-8F808D236C66}"/>
+              </a:ext>
+            </a:extLst>
+          </p:cNvPr>
+          <p:cNvSpPr txBox="1"/>
+          <p:nvPr/>
+        </p:nvSpPr>
+        <p:spPr>
+          <a:xfrm rot="21060000">
+            <a:off x="3126062" y="1971739"/>
+            <a:ext cx="1974388" cy="304800"/>
+          </a:xfrm>
+          <a:prstGeom prst="rect">
+            <a:avLst/>
+          </a:prstGeom>
+          <a:solidFill>
+            <a:srgbClr val="FFFF00"/>
+          </a:solidFill>
+        </p:spPr>
+        <p:txBody>
+          <a:bodyPr vert="horz" wrap="square" lIns="0" tIns="0" rIns="0" bIns="0" rtlCol="0">
+            <a:spAutoFit/>
+          </a:bodyPr>
+          <a:lstStyle/>
+          <a:p>
+            <a:pPr>
+              <a:lnSpc>
+                <a:spcPts val="2400"/>
+              </a:lnSpc>
+            </a:pPr>
+            <a:r>
+              <a:rPr sz="2400" spc="-30" dirty="0">
+                <a:solidFill>
+                  <a:srgbClr val="FF2600"/>
+                </a:solidFill>
                 <a:latin typeface="Arial MT"/>
                 <a:cs typeface="Arial MT"/>
-              </a:endParaRPr>
-            </a:p>
-          </p:txBody>
-        </p:sp>
-      </p:grpSp>
+              </a:rPr>
+              <a:t>Hea</a:t>
+            </a:r>
+            <a:r>
+              <a:rPr sz="3600" spc="-44" baseline="1157" dirty="0">
+                <a:solidFill>
+                  <a:srgbClr val="FF2600"/>
+                </a:solidFill>
+                <a:latin typeface="Arial MT"/>
+                <a:cs typeface="Arial MT"/>
+              </a:rPr>
+              <a:t>t</a:t>
+            </a:r>
+            <a:r>
+              <a:rPr sz="3600" spc="-202" baseline="1157" dirty="0">
+                <a:solidFill>
+                  <a:srgbClr val="FF2600"/>
+                </a:solidFill>
+                <a:latin typeface="Arial MT"/>
+                <a:cs typeface="Arial MT"/>
+              </a:rPr>
+              <a:t> </a:t>
+            </a:r>
+            <a:r>
+              <a:rPr sz="3600" spc="-15" baseline="1157" dirty="0">
+                <a:solidFill>
+                  <a:srgbClr val="FF2600"/>
+                </a:solidFill>
+                <a:latin typeface="Arial MT"/>
+                <a:cs typeface="Arial MT"/>
+              </a:rPr>
+              <a:t>Absorb</a:t>
+            </a:r>
+            <a:r>
+              <a:rPr sz="3600" spc="-15" baseline="2314" dirty="0">
+                <a:solidFill>
+                  <a:srgbClr val="FF2600"/>
+                </a:solidFill>
+                <a:latin typeface="Arial MT"/>
+                <a:cs typeface="Arial MT"/>
+              </a:rPr>
+              <a:t>er</a:t>
+            </a:r>
+            <a:endParaRPr sz="3600" baseline="2314" dirty="0">
+              <a:latin typeface="Arial MT"/>
+              <a:cs typeface="Arial MT"/>
+            </a:endParaRPr>
+          </a:p>
+        </p:txBody>
+      </p:sp>
     </p:spTree>
+    <p:extLst>
+      <p:ext uri="{BB962C8B-B14F-4D97-AF65-F5344CB8AC3E}">
+        <p14:creationId xmlns:p14="http://schemas.microsoft.com/office/powerpoint/2010/main" val="2084240058"/>
+      </p:ext>
+    </p:extLst>
   </p:cSld>
   <p:clrMapOvr>
     <a:masterClrMapping/>
@@ -45012,10 +44773,10 @@
       </p:grpSpPr>
       <p:pic>
         <p:nvPicPr>
-          <p:cNvPr id="36" name="Picture 35">
+          <p:cNvPr id="19" name="Picture 18">
             <a:extLst>
               <a:ext uri="{FF2B5EF4-FFF2-40B4-BE49-F238E27FC236}">
-                <a16:creationId xmlns:a16="http://schemas.microsoft.com/office/drawing/2014/main" id="{64DC2FAA-CA93-43FD-B5DA-0CDF291B245C}"/>
+                <a16:creationId xmlns:a16="http://schemas.microsoft.com/office/drawing/2014/main" id="{6D97EDC7-EE03-4E6F-9890-08355985321A}"/>
               </a:ext>
             </a:extLst>
           </p:cNvPr>
@@ -45032,7 +44793,7 @@
         </p:blipFill>
         <p:spPr>
           <a:xfrm>
-            <a:off x="1348168" y="1291801"/>
+            <a:off x="1385133" y="1002464"/>
             <a:ext cx="9347200" cy="3800680"/>
           </a:xfrm>
           <a:prstGeom prst="rect">
@@ -45083,7 +44844,7 @@
           </a:bodyPr>
           <a:lstStyle/>
           <a:p>
-            <a:pPr marL="4365625">
+            <a:pPr marL="2676525">
               <a:lnSpc>
                 <a:spcPct val="100000"/>
               </a:lnSpc>
@@ -45092,311 +44853,46 @@
               </a:spcBef>
             </a:pPr>
             <a:r>
-              <a:rPr spc="-10" dirty="0"/>
+              <a:rPr dirty="0"/>
               <a:t>FVLSPGM</a:t>
+            </a:r>
+            <a:r>
+              <a:rPr spc="-70" dirty="0"/>
+              <a:t> </a:t>
+            </a:r>
+            <a:r>
+              <a:rPr dirty="0"/>
+              <a:t>with</a:t>
+            </a:r>
+            <a:r>
+              <a:rPr spc="-75" dirty="0"/>
+              <a:t> </a:t>
+            </a:r>
+            <a:r>
+              <a:rPr dirty="0"/>
+              <a:t>Heat</a:t>
+            </a:r>
+            <a:r>
+              <a:rPr spc="-70" dirty="0"/>
+              <a:t> </a:t>
+            </a:r>
+            <a:r>
+              <a:rPr spc="-20" dirty="0"/>
+              <a:t>Load</a:t>
             </a:r>
           </a:p>
         </p:txBody>
       </p:sp>
-      <p:grpSp>
-        <p:nvGrpSpPr>
-          <p:cNvPr id="5" name="object 5"/>
-          <p:cNvGrpSpPr/>
-          <p:nvPr/>
-        </p:nvGrpSpPr>
-        <p:grpSpPr>
-          <a:xfrm>
-            <a:off x="1763141" y="911368"/>
-            <a:ext cx="4218305" cy="447675"/>
-            <a:chOff x="1763141" y="911368"/>
-            <a:chExt cx="4218305" cy="447675"/>
-          </a:xfrm>
-        </p:grpSpPr>
-        <p:sp>
-          <p:nvSpPr>
-            <p:cNvPr id="6" name="object 6"/>
-            <p:cNvSpPr/>
-            <p:nvPr/>
-          </p:nvSpPr>
-          <p:spPr>
-            <a:xfrm>
-              <a:off x="1911731" y="1134982"/>
-              <a:ext cx="1811655" cy="0"/>
-            </a:xfrm>
-            <a:custGeom>
-              <a:avLst/>
-              <a:gdLst/>
-              <a:ahLst/>
-              <a:cxnLst/>
-              <a:rect l="l" t="t" r="r" b="b"/>
-              <a:pathLst>
-                <a:path w="1811654">
-                  <a:moveTo>
-                    <a:pt x="1495612" y="0"/>
-                  </a:moveTo>
-                  <a:lnTo>
-                    <a:pt x="1811312" y="0"/>
-                  </a:lnTo>
-                </a:path>
-                <a:path w="1811654">
-                  <a:moveTo>
-                    <a:pt x="0" y="0"/>
-                  </a:moveTo>
-                  <a:lnTo>
-                    <a:pt x="645899" y="0"/>
-                  </a:lnTo>
-                </a:path>
-              </a:pathLst>
-            </a:custGeom>
-            <a:ln w="38100">
-              <a:solidFill>
-                <a:srgbClr val="919191"/>
-              </a:solidFill>
-            </a:ln>
-          </p:spPr>
-          <p:txBody>
-            <a:bodyPr wrap="square" lIns="0" tIns="0" rIns="0" bIns="0" rtlCol="0"/>
-            <a:lstStyle/>
-            <a:p>
-              <a:endParaRPr/>
-            </a:p>
-          </p:txBody>
-        </p:sp>
-        <p:sp>
-          <p:nvSpPr>
-            <p:cNvPr id="7" name="object 7"/>
-            <p:cNvSpPr/>
-            <p:nvPr/>
-          </p:nvSpPr>
-          <p:spPr>
-            <a:xfrm>
-              <a:off x="1763141" y="1051165"/>
-              <a:ext cx="2108835" cy="167640"/>
-            </a:xfrm>
-            <a:custGeom>
-              <a:avLst/>
-              <a:gdLst/>
-              <a:ahLst/>
-              <a:cxnLst/>
-              <a:rect l="l" t="t" r="r" b="b"/>
-              <a:pathLst>
-                <a:path w="2108835" h="167640">
-                  <a:moveTo>
-                    <a:pt x="167640" y="0"/>
-                  </a:moveTo>
-                  <a:lnTo>
-                    <a:pt x="0" y="83820"/>
-                  </a:lnTo>
-                  <a:lnTo>
-                    <a:pt x="167640" y="167640"/>
-                  </a:lnTo>
-                  <a:lnTo>
-                    <a:pt x="167640" y="0"/>
-                  </a:lnTo>
-                  <a:close/>
-                </a:path>
-                <a:path w="2108835" h="167640">
-                  <a:moveTo>
-                    <a:pt x="2108492" y="83820"/>
-                  </a:moveTo>
-                  <a:lnTo>
-                    <a:pt x="1940852" y="0"/>
-                  </a:lnTo>
-                  <a:lnTo>
-                    <a:pt x="1940852" y="167640"/>
-                  </a:lnTo>
-                  <a:lnTo>
-                    <a:pt x="2108492" y="83820"/>
-                  </a:lnTo>
-                  <a:close/>
-                </a:path>
-              </a:pathLst>
-            </a:custGeom>
-            <a:solidFill>
-              <a:srgbClr val="919191"/>
-            </a:solidFill>
-          </p:spPr>
-          <p:txBody>
-            <a:bodyPr wrap="square" lIns="0" tIns="0" rIns="0" bIns="0" rtlCol="0"/>
-            <a:lstStyle/>
-            <a:p>
-              <a:endParaRPr/>
-            </a:p>
-          </p:txBody>
-        </p:sp>
-        <p:sp>
-          <p:nvSpPr>
-            <p:cNvPr id="8" name="object 8"/>
-            <p:cNvSpPr/>
-            <p:nvPr/>
-          </p:nvSpPr>
-          <p:spPr>
-            <a:xfrm>
-              <a:off x="4021215" y="1116681"/>
-              <a:ext cx="1811655" cy="0"/>
-            </a:xfrm>
-            <a:custGeom>
-              <a:avLst/>
-              <a:gdLst/>
-              <a:ahLst/>
-              <a:cxnLst/>
-              <a:rect l="l" t="t" r="r" b="b"/>
-              <a:pathLst>
-                <a:path w="1811654">
-                  <a:moveTo>
-                    <a:pt x="0" y="0"/>
-                  </a:moveTo>
-                  <a:lnTo>
-                    <a:pt x="565683" y="0"/>
-                  </a:lnTo>
-                </a:path>
-                <a:path w="1811654">
-                  <a:moveTo>
-                    <a:pt x="1245881" y="0"/>
-                  </a:moveTo>
-                  <a:lnTo>
-                    <a:pt x="1811566" y="0"/>
-                  </a:lnTo>
-                </a:path>
-              </a:pathLst>
-            </a:custGeom>
-            <a:ln w="38100">
-              <a:solidFill>
-                <a:srgbClr val="919191"/>
-              </a:solidFill>
-            </a:ln>
-          </p:spPr>
-          <p:txBody>
-            <a:bodyPr wrap="square" lIns="0" tIns="0" rIns="0" bIns="0" rtlCol="0"/>
-            <a:lstStyle/>
-            <a:p>
-              <a:endParaRPr/>
-            </a:p>
-          </p:txBody>
-        </p:sp>
-        <p:sp>
-          <p:nvSpPr>
-            <p:cNvPr id="9" name="object 9"/>
-            <p:cNvSpPr/>
-            <p:nvPr/>
-          </p:nvSpPr>
-          <p:spPr>
-            <a:xfrm>
-              <a:off x="3872623" y="1032865"/>
-              <a:ext cx="2108835" cy="167640"/>
-            </a:xfrm>
-            <a:custGeom>
-              <a:avLst/>
-              <a:gdLst/>
-              <a:ahLst/>
-              <a:cxnLst/>
-              <a:rect l="l" t="t" r="r" b="b"/>
-              <a:pathLst>
-                <a:path w="2108835" h="167640">
-                  <a:moveTo>
-                    <a:pt x="167640" y="0"/>
-                  </a:moveTo>
-                  <a:lnTo>
-                    <a:pt x="0" y="83820"/>
-                  </a:lnTo>
-                  <a:lnTo>
-                    <a:pt x="167640" y="167640"/>
-                  </a:lnTo>
-                  <a:lnTo>
-                    <a:pt x="167640" y="0"/>
-                  </a:lnTo>
-                  <a:close/>
-                </a:path>
-                <a:path w="2108835" h="167640">
-                  <a:moveTo>
-                    <a:pt x="2108746" y="83820"/>
-                  </a:moveTo>
-                  <a:lnTo>
-                    <a:pt x="1941106" y="0"/>
-                  </a:lnTo>
-                  <a:lnTo>
-                    <a:pt x="1941106" y="167640"/>
-                  </a:lnTo>
-                  <a:lnTo>
-                    <a:pt x="2108746" y="83820"/>
-                  </a:lnTo>
-                  <a:close/>
-                </a:path>
-              </a:pathLst>
-            </a:custGeom>
-            <a:solidFill>
-              <a:srgbClr val="919191"/>
-            </a:solidFill>
-          </p:spPr>
-          <p:txBody>
-            <a:bodyPr wrap="square" lIns="0" tIns="0" rIns="0" bIns="0" rtlCol="0"/>
-            <a:lstStyle/>
-            <a:p>
-              <a:endParaRPr/>
-            </a:p>
-          </p:txBody>
-        </p:sp>
-        <p:sp>
-          <p:nvSpPr>
-            <p:cNvPr id="10" name="object 10"/>
-            <p:cNvSpPr/>
-            <p:nvPr/>
-          </p:nvSpPr>
-          <p:spPr>
-            <a:xfrm>
-              <a:off x="2557630" y="911368"/>
-              <a:ext cx="850265" cy="447675"/>
-            </a:xfrm>
-            <a:custGeom>
-              <a:avLst/>
-              <a:gdLst/>
-              <a:ahLst/>
-              <a:cxnLst/>
-              <a:rect l="l" t="t" r="r" b="b"/>
-              <a:pathLst>
-                <a:path w="850264" h="447675">
-                  <a:moveTo>
-                    <a:pt x="0" y="0"/>
-                  </a:moveTo>
-                  <a:lnTo>
-                    <a:pt x="849713" y="0"/>
-                  </a:lnTo>
-                  <a:lnTo>
-                    <a:pt x="849713" y="447227"/>
-                  </a:lnTo>
-                  <a:lnTo>
-                    <a:pt x="0" y="447227"/>
-                  </a:lnTo>
-                  <a:lnTo>
-                    <a:pt x="0" y="0"/>
-                  </a:lnTo>
-                  <a:close/>
-                </a:path>
-              </a:pathLst>
-            </a:custGeom>
-            <a:solidFill>
-              <a:srgbClr val="FFFFFF"/>
-            </a:solidFill>
-          </p:spPr>
-          <p:txBody>
-            <a:bodyPr wrap="square" lIns="0" tIns="0" rIns="0" bIns="0" rtlCol="0"/>
-            <a:lstStyle/>
-            <a:p>
-              <a:endParaRPr/>
-            </a:p>
-          </p:txBody>
-        </p:sp>
-      </p:grpSp>
       <p:sp>
         <p:nvSpPr>
-          <p:cNvPr id="11" name="object 11"/>
+          <p:cNvPr id="7" name="object 7"/>
           <p:cNvSpPr txBox="1"/>
           <p:nvPr/>
         </p:nvSpPr>
         <p:spPr>
           <a:xfrm>
-            <a:off x="2654300" y="927100"/>
-            <a:ext cx="703580" cy="391160"/>
+            <a:off x="9766300" y="1295400"/>
+            <a:ext cx="1279525" cy="391160"/>
           </a:xfrm>
           <a:prstGeom prst="rect">
             <a:avLst/>
@@ -45421,21 +44917,21 @@
                 <a:latin typeface="Arial MT"/>
                 <a:cs typeface="Arial MT"/>
               </a:rPr>
-              <a:t>28</a:t>
-            </a:r>
-            <a:r>
-              <a:rPr sz="2400" spc="-30" dirty="0">
+              <a:t>Slit</a:t>
+            </a:r>
+            <a:r>
+              <a:rPr sz="2400" spc="-40" dirty="0">
                 <a:latin typeface="Arial MT"/>
                 <a:cs typeface="Arial MT"/>
               </a:rPr>
               <a:t> </a:t>
             </a:r>
             <a:r>
-              <a:rPr sz="2400" spc="-50" dirty="0">
+              <a:rPr sz="2400" spc="-10" dirty="0">
                 <a:latin typeface="Arial MT"/>
                 <a:cs typeface="Arial MT"/>
               </a:rPr>
-              <a:t>m</a:t>
+              <a:t>plane</a:t>
             </a:r>
             <a:endParaRPr sz="2400">
               <a:latin typeface="Arial MT"/>
@@ -45444,56 +44940,28 @@
           </a:p>
         </p:txBody>
       </p:sp>
-      <p:sp>
-        <p:nvSpPr>
+      <p:pic>
+        <p:nvPicPr>
           <p:cNvPr id="12" name="object 12"/>
-          <p:cNvSpPr/>
+          <p:cNvPicPr/>
           <p:nvPr/>
-        </p:nvSpPr>
+        </p:nvPicPr>
+        <p:blipFill>
+          <a:blip r:embed="rId4" cstate="print"/>
+          <a:stretch>
+            <a:fillRect/>
+          </a:stretch>
+        </p:blipFill>
         <p:spPr>
           <a:xfrm>
-            <a:off x="4586898" y="893067"/>
-            <a:ext cx="680720" cy="447675"/>
+            <a:off x="2908300" y="8331200"/>
+            <a:ext cx="3807858" cy="1003300"/>
           </a:xfrm>
-          <a:custGeom>
-            <a:avLst/>
-            <a:gdLst/>
-            <a:ahLst/>
-            <a:cxnLst/>
-            <a:rect l="l" t="t" r="r" b="b"/>
-            <a:pathLst>
-              <a:path w="680720" h="447675">
-                <a:moveTo>
-                  <a:pt x="0" y="0"/>
-                </a:moveTo>
-                <a:lnTo>
-                  <a:pt x="680198" y="0"/>
-                </a:lnTo>
-                <a:lnTo>
-                  <a:pt x="680198" y="447227"/>
-                </a:lnTo>
-                <a:lnTo>
-                  <a:pt x="0" y="447227"/>
-                </a:lnTo>
-                <a:lnTo>
-                  <a:pt x="0" y="0"/>
-                </a:lnTo>
-                <a:close/>
-              </a:path>
-            </a:pathLst>
-          </a:custGeom>
-          <a:solidFill>
-            <a:srgbClr val="FFFFFF"/>
-          </a:solidFill>
-        </p:spPr>
-        <p:txBody>
-          <a:bodyPr wrap="square" lIns="0" tIns="0" rIns="0" bIns="0" rtlCol="0"/>
-          <a:lstStyle/>
-          <a:p>
-            <a:endParaRPr/>
-          </a:p>
-        </p:txBody>
-      </p:sp>
+          <a:prstGeom prst="rect">
+            <a:avLst/>
+          </a:prstGeom>
+        </p:spPr>
+      </p:pic>
       <p:sp>
         <p:nvSpPr>
           <p:cNvPr id="13" name="object 13"/>
@@ -45502,8 +44970,8 @@
         </p:nvSpPr>
         <p:spPr>
           <a:xfrm>
-            <a:off x="4686300" y="901700"/>
-            <a:ext cx="534035" cy="391160"/>
+            <a:off x="4749800" y="7747000"/>
+            <a:ext cx="1059180" cy="391160"/>
           </a:xfrm>
           <a:prstGeom prst="rect">
             <a:avLst/>
@@ -45524,25 +44992,11 @@
               </a:spcBef>
             </a:pPr>
             <a:r>
-              <a:rPr sz="2400" dirty="0">
+              <a:rPr sz="2400" spc="-10" dirty="0">
                 <a:latin typeface="Arial MT"/>
                 <a:cs typeface="Arial MT"/>
               </a:rPr>
-              <a:t>2</a:t>
-            </a:r>
-            <a:r>
-              <a:rPr sz="2400" spc="-15" dirty="0">
-                <a:latin typeface="Arial MT"/>
-                <a:cs typeface="Arial MT"/>
-              </a:rPr>
-              <a:t> </a:t>
-            </a:r>
-            <a:r>
-              <a:rPr sz="2400" spc="-50" dirty="0">
-                <a:latin typeface="Arial MT"/>
-                <a:cs typeface="Arial MT"/>
-              </a:rPr>
-              <a:t>m</a:t>
+              <a:t>Without</a:t>
             </a:r>
             <a:endParaRPr sz="2400">
               <a:latin typeface="Arial MT"/>
@@ -45551,193 +45005,38 @@
           </a:p>
         </p:txBody>
       </p:sp>
-      <p:grpSp>
-        <p:nvGrpSpPr>
+      <p:pic>
+        <p:nvPicPr>
           <p:cNvPr id="14" name="object 14"/>
-          <p:cNvGrpSpPr/>
+          <p:cNvPicPr/>
           <p:nvPr/>
-        </p:nvGrpSpPr>
-        <p:grpSpPr>
+        </p:nvPicPr>
+        <p:blipFill>
+          <a:blip r:embed="rId5" cstate="print"/>
+          <a:stretch>
+            <a:fillRect/>
+          </a:stretch>
+        </p:blipFill>
+        <p:spPr>
           <a:xfrm>
-            <a:off x="6021774" y="893067"/>
-            <a:ext cx="2045970" cy="447675"/>
-            <a:chOff x="6021774" y="893067"/>
-            <a:chExt cx="2045970" cy="447675"/>
+            <a:off x="7867234" y="8369300"/>
+            <a:ext cx="3804065" cy="939800"/>
           </a:xfrm>
-        </p:grpSpPr>
-        <p:sp>
-          <p:nvSpPr>
-            <p:cNvPr id="15" name="object 15"/>
-            <p:cNvSpPr/>
-            <p:nvPr/>
-          </p:nvSpPr>
-          <p:spPr>
-            <a:xfrm>
-              <a:off x="6170364" y="1116681"/>
-              <a:ext cx="1748789" cy="0"/>
-            </a:xfrm>
-            <a:custGeom>
-              <a:avLst/>
-              <a:gdLst/>
-              <a:ahLst/>
-              <a:cxnLst/>
-              <a:rect l="l" t="t" r="r" b="b"/>
-              <a:pathLst>
-                <a:path w="1748790">
-                  <a:moveTo>
-                    <a:pt x="0" y="0"/>
-                  </a:moveTo>
-                  <a:lnTo>
-                    <a:pt x="649441" y="0"/>
-                  </a:lnTo>
-                </a:path>
-                <a:path w="1748790">
-                  <a:moveTo>
-                    <a:pt x="1583838" y="0"/>
-                  </a:moveTo>
-                  <a:lnTo>
-                    <a:pt x="1748580" y="0"/>
-                  </a:lnTo>
-                </a:path>
-              </a:pathLst>
-            </a:custGeom>
-            <a:ln w="38100">
-              <a:solidFill>
-                <a:srgbClr val="919191"/>
-              </a:solidFill>
-            </a:ln>
-          </p:spPr>
-          <p:txBody>
-            <a:bodyPr wrap="square" lIns="0" tIns="0" rIns="0" bIns="0" rtlCol="0"/>
-            <a:lstStyle/>
-            <a:p>
-              <a:endParaRPr/>
-            </a:p>
-          </p:txBody>
-        </p:sp>
-        <p:sp>
-          <p:nvSpPr>
-            <p:cNvPr id="16" name="object 16"/>
-            <p:cNvSpPr/>
-            <p:nvPr/>
-          </p:nvSpPr>
-          <p:spPr>
-            <a:xfrm>
-              <a:off x="6021768" y="1032865"/>
-              <a:ext cx="2045970" cy="167640"/>
-            </a:xfrm>
-            <a:custGeom>
-              <a:avLst/>
-              <a:gdLst/>
-              <a:ahLst/>
-              <a:cxnLst/>
-              <a:rect l="l" t="t" r="r" b="b"/>
-              <a:pathLst>
-                <a:path w="2045970" h="167640">
-                  <a:moveTo>
-                    <a:pt x="167640" y="0"/>
-                  </a:moveTo>
-                  <a:lnTo>
-                    <a:pt x="0" y="83820"/>
-                  </a:lnTo>
-                  <a:lnTo>
-                    <a:pt x="167640" y="167640"/>
-                  </a:lnTo>
-                  <a:lnTo>
-                    <a:pt x="167640" y="0"/>
-                  </a:lnTo>
-                  <a:close/>
-                </a:path>
-                <a:path w="2045970" h="167640">
-                  <a:moveTo>
-                    <a:pt x="2045754" y="83820"/>
-                  </a:moveTo>
-                  <a:lnTo>
-                    <a:pt x="1878114" y="0"/>
-                  </a:lnTo>
-                  <a:lnTo>
-                    <a:pt x="1878114" y="167640"/>
-                  </a:lnTo>
-                  <a:lnTo>
-                    <a:pt x="2045754" y="83820"/>
-                  </a:lnTo>
-                  <a:close/>
-                </a:path>
-              </a:pathLst>
-            </a:custGeom>
-            <a:solidFill>
-              <a:srgbClr val="919191"/>
-            </a:solidFill>
-          </p:spPr>
-          <p:txBody>
-            <a:bodyPr wrap="square" lIns="0" tIns="0" rIns="0" bIns="0" rtlCol="0"/>
-            <a:lstStyle/>
-            <a:p>
-              <a:endParaRPr/>
-            </a:p>
-          </p:txBody>
-        </p:sp>
-        <p:sp>
-          <p:nvSpPr>
-            <p:cNvPr id="17" name="object 17"/>
-            <p:cNvSpPr/>
-            <p:nvPr/>
-          </p:nvSpPr>
-          <p:spPr>
-            <a:xfrm>
-              <a:off x="6819805" y="893067"/>
-              <a:ext cx="934719" cy="447675"/>
-            </a:xfrm>
-            <a:custGeom>
-              <a:avLst/>
-              <a:gdLst/>
-              <a:ahLst/>
-              <a:cxnLst/>
-              <a:rect l="l" t="t" r="r" b="b"/>
-              <a:pathLst>
-                <a:path w="934720" h="447675">
-                  <a:moveTo>
-                    <a:pt x="0" y="0"/>
-                  </a:moveTo>
-                  <a:lnTo>
-                    <a:pt x="934397" y="0"/>
-                  </a:lnTo>
-                  <a:lnTo>
-                    <a:pt x="934397" y="447227"/>
-                  </a:lnTo>
-                  <a:lnTo>
-                    <a:pt x="0" y="447227"/>
-                  </a:lnTo>
-                  <a:lnTo>
-                    <a:pt x="0" y="0"/>
-                  </a:lnTo>
-                  <a:close/>
-                </a:path>
-              </a:pathLst>
-            </a:custGeom>
-            <a:solidFill>
-              <a:srgbClr val="FFFFFF"/>
-            </a:solidFill>
-          </p:spPr>
-          <p:txBody>
-            <a:bodyPr wrap="square" lIns="0" tIns="0" rIns="0" bIns="0" rtlCol="0"/>
-            <a:lstStyle/>
-            <a:p>
-              <a:endParaRPr/>
-            </a:p>
-          </p:txBody>
-        </p:sp>
-      </p:grpSp>
+          <a:prstGeom prst="rect">
+            <a:avLst/>
+          </a:prstGeom>
+        </p:spPr>
+      </p:pic>
       <p:sp>
         <p:nvSpPr>
-          <p:cNvPr id="18" name="object 18"/>
+          <p:cNvPr id="15" name="object 15"/>
           <p:cNvSpPr txBox="1"/>
           <p:nvPr/>
         </p:nvSpPr>
         <p:spPr>
           <a:xfrm>
-            <a:off x="6921500" y="901700"/>
-            <a:ext cx="788035" cy="391160"/>
+            <a:off x="9118600" y="7772400"/>
+            <a:ext cx="635000" cy="391160"/>
           </a:xfrm>
           <a:prstGeom prst="rect">
             <a:avLst/>
@@ -45758,25 +45057,11 @@
               </a:spcBef>
             </a:pPr>
             <a:r>
-              <a:rPr sz="2400" dirty="0">
+              <a:rPr sz="2400" spc="-20" dirty="0">
                 <a:latin typeface="Arial MT"/>
                 <a:cs typeface="Arial MT"/>
               </a:rPr>
-              <a:t>0.3</a:t>
-            </a:r>
-            <a:r>
-              <a:rPr sz="2400" spc="-35" dirty="0">
-                <a:latin typeface="Arial MT"/>
-                <a:cs typeface="Arial MT"/>
-              </a:rPr>
-              <a:t> </a:t>
-            </a:r>
-            <a:r>
-              <a:rPr sz="2400" spc="-50" dirty="0">
-                <a:latin typeface="Arial MT"/>
-                <a:cs typeface="Arial MT"/>
-              </a:rPr>
-              <a:t>m</a:t>
+              <a:t>With</a:t>
             </a:r>
             <a:endParaRPr sz="2400">
               <a:latin typeface="Arial MT"/>
@@ -45787,439 +45072,7 @@
       </p:sp>
       <p:sp>
         <p:nvSpPr>
-          <p:cNvPr id="19" name="object 19"/>
-          <p:cNvSpPr txBox="1"/>
-          <p:nvPr/>
-        </p:nvSpPr>
-        <p:spPr>
-          <a:xfrm>
-            <a:off x="2255515" y="967035"/>
-            <a:ext cx="565150" cy="290830"/>
-          </a:xfrm>
-          <a:prstGeom prst="rect">
-            <a:avLst/>
-          </a:prstGeom>
-        </p:spPr>
-        <p:txBody>
-          <a:bodyPr vert="vert270" wrap="square" lIns="0" tIns="0" rIns="0" bIns="0" rtlCol="0">
-            <a:spAutoFit/>
-          </a:bodyPr>
-          <a:lstStyle/>
-          <a:p>
-            <a:pPr marL="12700">
-              <a:lnSpc>
-                <a:spcPts val="4300"/>
-              </a:lnSpc>
-            </a:pPr>
-            <a:r>
-              <a:rPr sz="3800" spc="-50" dirty="0">
-                <a:latin typeface="Arial MT"/>
-                <a:cs typeface="Arial MT"/>
-              </a:rPr>
-              <a:t>≈</a:t>
-            </a:r>
-            <a:endParaRPr sz="3800">
-              <a:latin typeface="Arial MT"/>
-              <a:cs typeface="Arial MT"/>
-            </a:endParaRPr>
-          </a:p>
-        </p:txBody>
-      </p:sp>
-      <p:grpSp>
-        <p:nvGrpSpPr>
-          <p:cNvPr id="20" name="object 20"/>
-          <p:cNvGrpSpPr/>
-          <p:nvPr/>
-        </p:nvGrpSpPr>
-        <p:grpSpPr>
-          <a:xfrm>
-            <a:off x="8071938" y="893067"/>
-            <a:ext cx="2108835" cy="447675"/>
-            <a:chOff x="8071938" y="893067"/>
-            <a:chExt cx="2108835" cy="447675"/>
-          </a:xfrm>
-        </p:grpSpPr>
-        <p:sp>
-          <p:nvSpPr>
-            <p:cNvPr id="21" name="object 21"/>
-            <p:cNvSpPr/>
-            <p:nvPr/>
-          </p:nvSpPr>
-          <p:spPr>
-            <a:xfrm>
-              <a:off x="8220528" y="1132933"/>
-              <a:ext cx="1811655" cy="0"/>
-            </a:xfrm>
-            <a:custGeom>
-              <a:avLst/>
-              <a:gdLst/>
-              <a:ahLst/>
-              <a:cxnLst/>
-              <a:rect l="l" t="t" r="r" b="b"/>
-              <a:pathLst>
-                <a:path w="1811654">
-                  <a:moveTo>
-                    <a:pt x="0" y="0"/>
-                  </a:moveTo>
-                  <a:lnTo>
-                    <a:pt x="580029" y="0"/>
-                  </a:lnTo>
-                </a:path>
-                <a:path w="1811654">
-                  <a:moveTo>
-                    <a:pt x="1514426" y="0"/>
-                  </a:moveTo>
-                  <a:lnTo>
-                    <a:pt x="1811312" y="0"/>
-                  </a:lnTo>
-                </a:path>
-              </a:pathLst>
-            </a:custGeom>
-            <a:ln w="38100">
-              <a:solidFill>
-                <a:srgbClr val="919191"/>
-              </a:solidFill>
-            </a:ln>
-          </p:spPr>
-          <p:txBody>
-            <a:bodyPr wrap="square" lIns="0" tIns="0" rIns="0" bIns="0" rtlCol="0"/>
-            <a:lstStyle/>
-            <a:p>
-              <a:endParaRPr/>
-            </a:p>
-          </p:txBody>
-        </p:sp>
-        <p:sp>
-          <p:nvSpPr>
-            <p:cNvPr id="22" name="object 22"/>
-            <p:cNvSpPr/>
-            <p:nvPr/>
-          </p:nvSpPr>
-          <p:spPr>
-            <a:xfrm>
-              <a:off x="8071929" y="1049121"/>
-              <a:ext cx="2108835" cy="167640"/>
-            </a:xfrm>
-            <a:custGeom>
-              <a:avLst/>
-              <a:gdLst/>
-              <a:ahLst/>
-              <a:cxnLst/>
-              <a:rect l="l" t="t" r="r" b="b"/>
-              <a:pathLst>
-                <a:path w="2108834" h="167640">
-                  <a:moveTo>
-                    <a:pt x="167640" y="0"/>
-                  </a:moveTo>
-                  <a:lnTo>
-                    <a:pt x="0" y="83820"/>
-                  </a:lnTo>
-                  <a:lnTo>
-                    <a:pt x="167640" y="167640"/>
-                  </a:lnTo>
-                  <a:lnTo>
-                    <a:pt x="167640" y="0"/>
-                  </a:lnTo>
-                  <a:close/>
-                </a:path>
-                <a:path w="2108834" h="167640">
-                  <a:moveTo>
-                    <a:pt x="2108492" y="83820"/>
-                  </a:moveTo>
-                  <a:lnTo>
-                    <a:pt x="1940852" y="0"/>
-                  </a:lnTo>
-                  <a:lnTo>
-                    <a:pt x="1940852" y="167640"/>
-                  </a:lnTo>
-                  <a:lnTo>
-                    <a:pt x="2108492" y="83820"/>
-                  </a:lnTo>
-                  <a:close/>
-                </a:path>
-              </a:pathLst>
-            </a:custGeom>
-            <a:solidFill>
-              <a:srgbClr val="919191"/>
-            </a:solidFill>
-          </p:spPr>
-          <p:txBody>
-            <a:bodyPr wrap="square" lIns="0" tIns="0" rIns="0" bIns="0" rtlCol="0"/>
-            <a:lstStyle/>
-            <a:p>
-              <a:endParaRPr/>
-            </a:p>
-          </p:txBody>
-        </p:sp>
-        <p:sp>
-          <p:nvSpPr>
-            <p:cNvPr id="23" name="object 23"/>
-            <p:cNvSpPr/>
-            <p:nvPr/>
-          </p:nvSpPr>
-          <p:spPr>
-            <a:xfrm>
-              <a:off x="8800557" y="893067"/>
-              <a:ext cx="934719" cy="447675"/>
-            </a:xfrm>
-            <a:custGeom>
-              <a:avLst/>
-              <a:gdLst/>
-              <a:ahLst/>
-              <a:cxnLst/>
-              <a:rect l="l" t="t" r="r" b="b"/>
-              <a:pathLst>
-                <a:path w="934720" h="447675">
-                  <a:moveTo>
-                    <a:pt x="0" y="0"/>
-                  </a:moveTo>
-                  <a:lnTo>
-                    <a:pt x="934397" y="0"/>
-                  </a:lnTo>
-                  <a:lnTo>
-                    <a:pt x="934397" y="447227"/>
-                  </a:lnTo>
-                  <a:lnTo>
-                    <a:pt x="0" y="447227"/>
-                  </a:lnTo>
-                  <a:lnTo>
-                    <a:pt x="0" y="0"/>
-                  </a:lnTo>
-                  <a:close/>
-                </a:path>
-              </a:pathLst>
-            </a:custGeom>
-            <a:solidFill>
-              <a:srgbClr val="FFFFFF"/>
-            </a:solidFill>
-          </p:spPr>
-          <p:txBody>
-            <a:bodyPr wrap="square" lIns="0" tIns="0" rIns="0" bIns="0" rtlCol="0"/>
-            <a:lstStyle/>
-            <a:p>
-              <a:endParaRPr/>
-            </a:p>
-          </p:txBody>
-        </p:sp>
-      </p:grpSp>
-      <p:sp>
-        <p:nvSpPr>
-          <p:cNvPr id="24" name="object 24"/>
-          <p:cNvSpPr txBox="1"/>
-          <p:nvPr/>
-        </p:nvSpPr>
-        <p:spPr>
-          <a:xfrm>
-            <a:off x="8902700" y="901700"/>
-            <a:ext cx="703580" cy="391160"/>
-          </a:xfrm>
-          <a:prstGeom prst="rect">
-            <a:avLst/>
-          </a:prstGeom>
-        </p:spPr>
-        <p:txBody>
-          <a:bodyPr vert="horz" wrap="square" lIns="0" tIns="12700" rIns="0" bIns="0" rtlCol="0">
-            <a:spAutoFit/>
-          </a:bodyPr>
-          <a:lstStyle/>
-          <a:p>
-            <a:pPr marL="12700">
-              <a:lnSpc>
-                <a:spcPct val="100000"/>
-              </a:lnSpc>
-              <a:spcBef>
-                <a:spcPts val="100"/>
-              </a:spcBef>
-            </a:pPr>
-            <a:r>
-              <a:rPr sz="2400" dirty="0">
-                <a:latin typeface="Arial MT"/>
-                <a:cs typeface="Arial MT"/>
-              </a:rPr>
-              <a:t>10</a:t>
-            </a:r>
-            <a:r>
-              <a:rPr sz="2400" spc="-30" dirty="0">
-                <a:latin typeface="Arial MT"/>
-                <a:cs typeface="Arial MT"/>
-              </a:rPr>
-              <a:t> </a:t>
-            </a:r>
-            <a:r>
-              <a:rPr sz="2400" spc="-50" dirty="0">
-                <a:latin typeface="Arial MT"/>
-                <a:cs typeface="Arial MT"/>
-              </a:rPr>
-              <a:t>m</a:t>
-            </a:r>
-            <a:endParaRPr sz="2400">
-              <a:latin typeface="Arial MT"/>
-              <a:cs typeface="Arial MT"/>
-            </a:endParaRPr>
-          </a:p>
-        </p:txBody>
-      </p:sp>
-      <p:sp>
-        <p:nvSpPr>
-          <p:cNvPr id="25" name="object 25"/>
-          <p:cNvSpPr txBox="1"/>
-          <p:nvPr/>
-        </p:nvSpPr>
-        <p:spPr>
-          <a:xfrm>
-            <a:off x="8478515" y="941635"/>
-            <a:ext cx="565150" cy="290830"/>
-          </a:xfrm>
-          <a:prstGeom prst="rect">
-            <a:avLst/>
-          </a:prstGeom>
-        </p:spPr>
-        <p:txBody>
-          <a:bodyPr vert="vert270" wrap="square" lIns="0" tIns="0" rIns="0" bIns="0" rtlCol="0">
-            <a:spAutoFit/>
-          </a:bodyPr>
-          <a:lstStyle/>
-          <a:p>
-            <a:pPr marL="12700">
-              <a:lnSpc>
-                <a:spcPts val="4300"/>
-              </a:lnSpc>
-            </a:pPr>
-            <a:r>
-              <a:rPr sz="3800" spc="-50" dirty="0">
-                <a:latin typeface="Arial MT"/>
-                <a:cs typeface="Arial MT"/>
-              </a:rPr>
-              <a:t>≈</a:t>
-            </a:r>
-            <a:endParaRPr sz="3800">
-              <a:latin typeface="Arial MT"/>
-              <a:cs typeface="Arial MT"/>
-            </a:endParaRPr>
-          </a:p>
-        </p:txBody>
-      </p:sp>
-      <p:sp>
-        <p:nvSpPr>
-          <p:cNvPr id="26" name="object 26"/>
-          <p:cNvSpPr txBox="1"/>
-          <p:nvPr/>
-        </p:nvSpPr>
-        <p:spPr>
-          <a:xfrm>
-            <a:off x="9766300" y="1295400"/>
-            <a:ext cx="1279525" cy="391160"/>
-          </a:xfrm>
-          <a:prstGeom prst="rect">
-            <a:avLst/>
-          </a:prstGeom>
-        </p:spPr>
-        <p:txBody>
-          <a:bodyPr vert="horz" wrap="square" lIns="0" tIns="12700" rIns="0" bIns="0" rtlCol="0">
-            <a:spAutoFit/>
-          </a:bodyPr>
-          <a:lstStyle/>
-          <a:p>
-            <a:pPr marL="12700">
-              <a:lnSpc>
-                <a:spcPct val="100000"/>
-              </a:lnSpc>
-              <a:spcBef>
-                <a:spcPts val="100"/>
-              </a:spcBef>
-            </a:pPr>
-            <a:r>
-              <a:rPr sz="2400" dirty="0">
-                <a:latin typeface="Arial MT"/>
-                <a:cs typeface="Arial MT"/>
-              </a:rPr>
-              <a:t>Slit</a:t>
-            </a:r>
-            <a:r>
-              <a:rPr sz="2400" spc="-40" dirty="0">
-                <a:latin typeface="Arial MT"/>
-                <a:cs typeface="Arial MT"/>
-              </a:rPr>
-              <a:t> </a:t>
-            </a:r>
-            <a:r>
-              <a:rPr sz="2400" spc="-10" dirty="0">
-                <a:latin typeface="Arial MT"/>
-                <a:cs typeface="Arial MT"/>
-              </a:rPr>
-              <a:t>plane</a:t>
-            </a:r>
-            <a:endParaRPr sz="2400">
-              <a:latin typeface="Arial MT"/>
-              <a:cs typeface="Arial MT"/>
-            </a:endParaRPr>
-          </a:p>
-        </p:txBody>
-      </p:sp>
-      <p:sp>
-        <p:nvSpPr>
-          <p:cNvPr id="29" name="object 29"/>
-          <p:cNvSpPr txBox="1"/>
-          <p:nvPr/>
-        </p:nvSpPr>
-        <p:spPr>
-          <a:xfrm>
-            <a:off x="3556000" y="2910840"/>
-            <a:ext cx="741045" cy="746760"/>
-          </a:xfrm>
-          <a:prstGeom prst="rect">
-            <a:avLst/>
-          </a:prstGeom>
-        </p:spPr>
-        <p:txBody>
-          <a:bodyPr vert="horz" wrap="square" lIns="0" tIns="12700" rIns="0" bIns="0" rtlCol="0">
-            <a:spAutoFit/>
-          </a:bodyPr>
-          <a:lstStyle/>
-          <a:p>
-            <a:pPr marL="12700">
-              <a:lnSpc>
-                <a:spcPts val="2840"/>
-              </a:lnSpc>
-              <a:spcBef>
-                <a:spcPts val="100"/>
-              </a:spcBef>
-            </a:pPr>
-            <a:r>
-              <a:rPr sz="2400" spc="-10" dirty="0">
-                <a:latin typeface="Arial MT"/>
-                <a:cs typeface="Arial MT"/>
-              </a:rPr>
-              <a:t>88.5°</a:t>
-            </a:r>
-            <a:endParaRPr sz="2400">
-              <a:latin typeface="Arial MT"/>
-              <a:cs typeface="Arial MT"/>
-            </a:endParaRPr>
-          </a:p>
-          <a:p>
-            <a:pPr marL="177800">
-              <a:lnSpc>
-                <a:spcPts val="2840"/>
-              </a:lnSpc>
-            </a:pPr>
-            <a:r>
-              <a:rPr sz="2400" spc="-20" dirty="0">
-                <a:latin typeface="Arial MT"/>
-                <a:cs typeface="Arial MT"/>
-              </a:rPr>
-              <a:t>left</a:t>
-            </a:r>
-            <a:endParaRPr sz="2400">
-              <a:latin typeface="Arial MT"/>
-              <a:cs typeface="Arial MT"/>
-            </a:endParaRPr>
-          </a:p>
-        </p:txBody>
-      </p:sp>
-      <p:sp>
-        <p:nvSpPr>
-          <p:cNvPr id="33" name="object 33"/>
+          <p:cNvPr id="16" name="object 16"/>
           <p:cNvSpPr txBox="1">
             <a:spLocks noGrp="1"/>
           </p:cNvSpPr>
@@ -46319,7 +45172,7 @@
       </p:sp>
       <p:sp>
         <p:nvSpPr>
-          <p:cNvPr id="34" name="object 34"/>
+          <p:cNvPr id="17" name="object 17"/>
           <p:cNvSpPr txBox="1">
             <a:spLocks noGrp="1"/>
           </p:cNvSpPr>
@@ -46356,7 +45209,7 @@
       </p:sp>
       <p:sp>
         <p:nvSpPr>
-          <p:cNvPr id="35" name="object 35"/>
+          <p:cNvPr id="18" name="object 18"/>
           <p:cNvSpPr txBox="1"/>
           <p:nvPr/>
         </p:nvSpPr>
@@ -46400,240 +45253,12 @@
           </a:p>
         </p:txBody>
       </p:sp>
-      <p:sp>
-        <p:nvSpPr>
-          <p:cNvPr id="30" name="object 30"/>
-          <p:cNvSpPr txBox="1"/>
-          <p:nvPr/>
-        </p:nvSpPr>
-        <p:spPr>
-          <a:xfrm>
-            <a:off x="5549900" y="2910840"/>
-            <a:ext cx="754380" cy="746760"/>
-          </a:xfrm>
-          <a:prstGeom prst="rect">
-            <a:avLst/>
-          </a:prstGeom>
-        </p:spPr>
-        <p:txBody>
-          <a:bodyPr vert="horz" wrap="square" lIns="0" tIns="12700" rIns="0" bIns="0" rtlCol="0">
-            <a:spAutoFit/>
-          </a:bodyPr>
-          <a:lstStyle/>
-          <a:p>
-            <a:pPr marL="12700">
-              <a:lnSpc>
-                <a:spcPts val="2840"/>
-              </a:lnSpc>
-              <a:spcBef>
-                <a:spcPts val="100"/>
-              </a:spcBef>
-            </a:pPr>
-            <a:r>
-              <a:rPr sz="2400" spc="-10" dirty="0">
-                <a:latin typeface="Arial MT"/>
-                <a:cs typeface="Arial MT"/>
-              </a:rPr>
-              <a:t>87.8°</a:t>
-            </a:r>
-            <a:endParaRPr sz="2400">
-              <a:latin typeface="Arial MT"/>
-              <a:cs typeface="Arial MT"/>
-            </a:endParaRPr>
-          </a:p>
-          <a:p>
-            <a:pPr marL="12700">
-              <a:lnSpc>
-                <a:spcPts val="2840"/>
-              </a:lnSpc>
-            </a:pPr>
-            <a:r>
-              <a:rPr sz="2400" spc="-20" dirty="0">
-                <a:latin typeface="Arial MT"/>
-                <a:cs typeface="Arial MT"/>
-              </a:rPr>
-              <a:t>down</a:t>
-            </a:r>
-            <a:endParaRPr sz="2400">
-              <a:latin typeface="Arial MT"/>
-              <a:cs typeface="Arial MT"/>
-            </a:endParaRPr>
-          </a:p>
-        </p:txBody>
-      </p:sp>
-      <p:sp>
-        <p:nvSpPr>
-          <p:cNvPr id="31" name="object 31"/>
-          <p:cNvSpPr txBox="1"/>
-          <p:nvPr/>
-        </p:nvSpPr>
-        <p:spPr>
-          <a:xfrm>
-            <a:off x="6946900" y="2910840"/>
-            <a:ext cx="2329180" cy="746760"/>
-          </a:xfrm>
-          <a:prstGeom prst="rect">
-            <a:avLst/>
-          </a:prstGeom>
-        </p:spPr>
-        <p:txBody>
-          <a:bodyPr vert="horz" wrap="square" lIns="0" tIns="12700" rIns="0" bIns="0" rtlCol="0">
-            <a:spAutoFit/>
-          </a:bodyPr>
-          <a:lstStyle/>
-          <a:p>
-            <a:pPr algn="ctr">
-              <a:lnSpc>
-                <a:spcPts val="2840"/>
-              </a:lnSpc>
-              <a:spcBef>
-                <a:spcPts val="100"/>
-              </a:spcBef>
-            </a:pPr>
-            <a:r>
-              <a:rPr sz="2400" i="1" dirty="0">
-                <a:latin typeface="Arial"/>
-                <a:cs typeface="Arial"/>
-              </a:rPr>
-              <a:t>α</a:t>
-            </a:r>
-            <a:r>
-              <a:rPr sz="2400" dirty="0">
-                <a:latin typeface="Arial MT"/>
-                <a:cs typeface="Arial MT"/>
-              </a:rPr>
-              <a:t>=88.5°,</a:t>
-            </a:r>
-            <a:r>
-              <a:rPr sz="2400" spc="-90" dirty="0">
-                <a:latin typeface="Arial MT"/>
-                <a:cs typeface="Arial MT"/>
-              </a:rPr>
-              <a:t> </a:t>
-            </a:r>
-            <a:r>
-              <a:rPr sz="2400" i="1" spc="-10" dirty="0">
-                <a:latin typeface="Arial"/>
-                <a:cs typeface="Arial"/>
-              </a:rPr>
-              <a:t>β</a:t>
-            </a:r>
-            <a:r>
-              <a:rPr sz="2400" spc="-10" dirty="0">
-                <a:latin typeface="Arial MT"/>
-                <a:cs typeface="Arial MT"/>
-              </a:rPr>
-              <a:t>=87.1°</a:t>
-            </a:r>
-            <a:endParaRPr sz="2400">
-              <a:latin typeface="Arial MT"/>
-              <a:cs typeface="Arial MT"/>
-            </a:endParaRPr>
-          </a:p>
-          <a:p>
-            <a:pPr marR="635" algn="ctr">
-              <a:lnSpc>
-                <a:spcPts val="2840"/>
-              </a:lnSpc>
-            </a:pPr>
-            <a:r>
-              <a:rPr sz="2400" spc="-25" dirty="0">
-                <a:latin typeface="Arial MT"/>
-                <a:cs typeface="Arial MT"/>
-              </a:rPr>
-              <a:t>up</a:t>
-            </a:r>
-            <a:endParaRPr sz="2400">
-              <a:latin typeface="Arial MT"/>
-              <a:cs typeface="Arial MT"/>
-            </a:endParaRPr>
-          </a:p>
-        </p:txBody>
-      </p:sp>
-      <p:sp>
-        <p:nvSpPr>
-          <p:cNvPr id="32" name="object 32"/>
-          <p:cNvSpPr txBox="1"/>
-          <p:nvPr/>
-        </p:nvSpPr>
-        <p:spPr>
-          <a:xfrm>
-            <a:off x="10350500" y="2910840"/>
-            <a:ext cx="2211070" cy="746760"/>
-          </a:xfrm>
-          <a:prstGeom prst="rect">
-            <a:avLst/>
-          </a:prstGeom>
-        </p:spPr>
-        <p:txBody>
-          <a:bodyPr vert="horz" wrap="square" lIns="0" tIns="33020" rIns="0" bIns="0" rtlCol="0">
-            <a:spAutoFit/>
-          </a:bodyPr>
-          <a:lstStyle/>
-          <a:p>
-            <a:pPr marL="12700" marR="5080">
-              <a:lnSpc>
-                <a:spcPts val="2800"/>
-              </a:lnSpc>
-              <a:spcBef>
-                <a:spcPts val="260"/>
-              </a:spcBef>
-            </a:pPr>
-            <a:r>
-              <a:rPr sz="2400" dirty="0">
-                <a:latin typeface="Arial MT"/>
-                <a:cs typeface="Arial MT"/>
-              </a:rPr>
-              <a:t>Horizontal</a:t>
-            </a:r>
-            <a:r>
-              <a:rPr sz="2400" spc="-120" dirty="0">
-                <a:latin typeface="Arial MT"/>
-                <a:cs typeface="Arial MT"/>
-              </a:rPr>
-              <a:t> </a:t>
-            </a:r>
-            <a:r>
-              <a:rPr sz="2400" spc="-10" dirty="0">
-                <a:latin typeface="Arial MT"/>
-                <a:cs typeface="Arial MT"/>
-              </a:rPr>
-              <a:t>focus </a:t>
-            </a:r>
-            <a:r>
-              <a:rPr sz="2400" dirty="0">
-                <a:latin typeface="Arial MT"/>
-                <a:cs typeface="Arial MT"/>
-              </a:rPr>
-              <a:t>after</a:t>
-            </a:r>
-            <a:r>
-              <a:rPr sz="2400" spc="-50" dirty="0">
-                <a:latin typeface="Arial MT"/>
-                <a:cs typeface="Arial MT"/>
-              </a:rPr>
-              <a:t> </a:t>
-            </a:r>
-            <a:r>
-              <a:rPr sz="2400" spc="-20" dirty="0">
-                <a:latin typeface="Arial MT"/>
-                <a:cs typeface="Arial MT"/>
-              </a:rPr>
-              <a:t>slit</a:t>
-            </a:r>
-            <a:endParaRPr sz="2400">
-              <a:latin typeface="Arial MT"/>
-              <a:cs typeface="Arial MT"/>
-            </a:endParaRPr>
-          </a:p>
-        </p:txBody>
-      </p:sp>
       <p:pic>
         <p:nvPicPr>
-          <p:cNvPr id="45" name="Picture 44">
+          <p:cNvPr id="4" name="Picture 3">
             <a:extLst>
               <a:ext uri="{FF2B5EF4-FFF2-40B4-BE49-F238E27FC236}">
-                <a16:creationId xmlns:a16="http://schemas.microsoft.com/office/drawing/2014/main" id="{CD7DDD1B-2042-4EC3-B1FD-0978401AFC43}"/>
+                <a16:creationId xmlns:a16="http://schemas.microsoft.com/office/drawing/2014/main" id="{1F1922B2-18DD-484E-849C-3663B7AE330A}"/>
               </a:ext>
             </a:extLst>
           </p:cNvPr>
@@ -46643,15 +45268,15 @@
           <p:nvPr/>
         </p:nvPicPr>
         <p:blipFill>
-          <a:blip r:embed="rId4"/>
+          <a:blip r:embed="rId6"/>
           <a:stretch>
             <a:fillRect/>
           </a:stretch>
         </p:blipFill>
         <p:spPr>
           <a:xfrm>
-            <a:off x="1449700" y="5198134"/>
-            <a:ext cx="4597467" cy="3853368"/>
+            <a:off x="6920415" y="3092695"/>
+            <a:ext cx="5031369" cy="4523018"/>
           </a:xfrm>
           <a:prstGeom prst="rect">
             <a:avLst/>
@@ -46660,10 +45285,10 @@
       </p:pic>
       <p:pic>
         <p:nvPicPr>
-          <p:cNvPr id="46" name="Picture 45">
+          <p:cNvPr id="6" name="Picture 5">
             <a:extLst>
               <a:ext uri="{FF2B5EF4-FFF2-40B4-BE49-F238E27FC236}">
-                <a16:creationId xmlns:a16="http://schemas.microsoft.com/office/drawing/2014/main" id="{93F099A0-203D-445A-88C5-5FE0FEEB13CA}"/>
+                <a16:creationId xmlns:a16="http://schemas.microsoft.com/office/drawing/2014/main" id="{FE2809E2-CB0E-4BCE-A21D-7A0C3ABBB730}"/>
               </a:ext>
             </a:extLst>
           </p:cNvPr>
@@ -46673,681 +45298,91 @@
           <p:nvPr/>
         </p:nvPicPr>
         <p:blipFill>
-          <a:blip r:embed="rId5"/>
+          <a:blip r:embed="rId7"/>
           <a:stretch>
             <a:fillRect/>
           </a:stretch>
         </p:blipFill>
         <p:spPr>
           <a:xfrm>
-            <a:off x="6983034" y="6541566"/>
-            <a:ext cx="4016500" cy="1267429"/>
+            <a:off x="643184" y="4804393"/>
+            <a:ext cx="3379157" cy="3631542"/>
           </a:xfrm>
           <a:prstGeom prst="rect">
             <a:avLst/>
           </a:prstGeom>
         </p:spPr>
       </p:pic>
-    </p:spTree>
-    <p:extLst>
-      <p:ext uri="{BB962C8B-B14F-4D97-AF65-F5344CB8AC3E}">
-        <p14:creationId xmlns:p14="http://schemas.microsoft.com/office/powerpoint/2010/main" val="2084240058"/>
-      </p:ext>
-    </p:extLst>
-  </p:cSld>
-  <p:clrMapOvr>
-    <a:masterClrMapping/>
-  </p:clrMapOvr>
-</p:sld>
-</file>
-
-<file path=ppt/slides/slide41.xml><?xml version="1.0" encoding="utf-8"?>
-<p:sld xmlns:a="http://schemas.openxmlformats.org/drawingml/2006/main" xmlns:r="http://schemas.openxmlformats.org/officeDocument/2006/relationships" xmlns:p="http://schemas.openxmlformats.org/presentationml/2006/main">
-  <p:cSld>
-    <p:spTree>
-      <p:nvGrpSpPr>
-        <p:cNvPr id="1" name=""/>
-        <p:cNvGrpSpPr/>
-        <p:nvPr/>
-      </p:nvGrpSpPr>
-      <p:grpSpPr>
-        <a:xfrm>
-          <a:off x="0" y="0"/>
-          <a:ext cx="0" cy="0"/>
-          <a:chOff x="0" y="0"/>
-          <a:chExt cx="0" cy="0"/>
-        </a:xfrm>
-      </p:grpSpPr>
-      <p:pic>
-        <p:nvPicPr>
-          <p:cNvPr id="19" name="Picture 18">
+      <p:cxnSp>
+        <p:nvCxnSpPr>
+          <p:cNvPr id="21" name="Straight Arrow Connector 20">
             <a:extLst>
               <a:ext uri="{FF2B5EF4-FFF2-40B4-BE49-F238E27FC236}">
-                <a16:creationId xmlns:a16="http://schemas.microsoft.com/office/drawing/2014/main" id="{6D97EDC7-EE03-4E6F-9890-08355985321A}"/>
+                <a16:creationId xmlns:a16="http://schemas.microsoft.com/office/drawing/2014/main" id="{1D9CF9FA-E497-4F42-AA5E-CBFD8DB21064}"/>
               </a:ext>
             </a:extLst>
           </p:cNvPr>
-          <p:cNvPicPr>
-            <a:picLocks noChangeAspect="1"/>
-          </p:cNvPicPr>
+          <p:cNvCxnSpPr/>
           <p:nvPr/>
-        </p:nvPicPr>
-        <p:blipFill>
-          <a:blip r:embed="rId2"/>
-          <a:stretch>
-            <a:fillRect/>
-          </a:stretch>
-        </p:blipFill>
+        </p:nvCxnSpPr>
+        <p:spPr>
+          <a:xfrm flipV="1">
+            <a:off x="4216400" y="2667000"/>
+            <a:ext cx="1447800" cy="3953164"/>
+          </a:xfrm>
+          <a:prstGeom prst="straightConnector1">
+            <a:avLst/>
+          </a:prstGeom>
+          <a:ln>
+            <a:tailEnd type="triangle"/>
+          </a:ln>
+        </p:spPr>
+        <p:style>
+          <a:lnRef idx="1">
+            <a:schemeClr val="accent1"/>
+          </a:lnRef>
+          <a:fillRef idx="0">
+            <a:schemeClr val="accent1"/>
+          </a:fillRef>
+          <a:effectRef idx="0">
+            <a:schemeClr val="accent1"/>
+          </a:effectRef>
+          <a:fontRef idx="minor">
+            <a:schemeClr val="tx1"/>
+          </a:fontRef>
+        </p:style>
+      </p:cxnSp>
+      <p:sp>
+        <p:nvSpPr>
+          <p:cNvPr id="22" name="Rectangle 21">
+            <a:extLst>
+              <a:ext uri="{FF2B5EF4-FFF2-40B4-BE49-F238E27FC236}">
+                <a16:creationId xmlns:a16="http://schemas.microsoft.com/office/drawing/2014/main" id="{993C6D0F-34C5-48EB-9F95-14636B267B04}"/>
+              </a:ext>
+            </a:extLst>
+          </p:cNvPr>
+          <p:cNvSpPr/>
+          <p:nvPr/>
+        </p:nvSpPr>
         <p:spPr>
           <a:xfrm>
-            <a:off x="1409700" y="981290"/>
-            <a:ext cx="9347200" cy="3800680"/>
+            <a:off x="19065" y="18782"/>
+            <a:ext cx="4750018" cy="369332"/>
           </a:xfrm>
           <a:prstGeom prst="rect">
             <a:avLst/>
           </a:prstGeom>
         </p:spPr>
-      </p:pic>
-      <p:pic>
-        <p:nvPicPr>
-          <p:cNvPr id="2" name="object 2"/>
-          <p:cNvPicPr/>
-          <p:nvPr/>
-        </p:nvPicPr>
-        <p:blipFill>
-          <a:blip r:embed="rId3" cstate="print"/>
-          <a:stretch>
-            <a:fillRect/>
-          </a:stretch>
-        </p:blipFill>
-        <p:spPr>
-          <a:xfrm>
-            <a:off x="7726754" y="0"/>
-            <a:ext cx="5278045" cy="215900"/>
-          </a:xfrm>
-          <a:prstGeom prst="rect">
-            <a:avLst/>
-          </a:prstGeom>
-        </p:spPr>
-      </p:pic>
-      <p:sp>
-        <p:nvSpPr>
-          <p:cNvPr id="3" name="object 3"/>
-          <p:cNvSpPr txBox="1">
-            <a:spLocks noGrp="1"/>
-          </p:cNvSpPr>
-          <p:nvPr>
-            <p:ph type="title"/>
-          </p:nvPr>
-        </p:nvSpPr>
-        <p:spPr>
-          <a:prstGeom prst="rect">
-            <a:avLst/>
-          </a:prstGeom>
-        </p:spPr>
         <p:txBody>
-          <a:bodyPr vert="horz" wrap="square" lIns="0" tIns="12700" rIns="0" bIns="0" rtlCol="0">
+          <a:bodyPr wrap="none">
             <a:spAutoFit/>
           </a:bodyPr>
           <a:lstStyle/>
           <a:p>
-            <a:pPr marL="2676525">
-              <a:lnSpc>
-                <a:spcPct val="100000"/>
-              </a:lnSpc>
-              <a:spcBef>
-                <a:spcPts val="100"/>
-              </a:spcBef>
-            </a:pPr>
-            <a:r>
-              <a:rPr dirty="0"/>
-              <a:t>FVLSPGM</a:t>
-            </a:r>
-            <a:r>
-              <a:rPr spc="-70" dirty="0"/>
-              <a:t> </a:t>
-            </a:r>
-            <a:r>
-              <a:rPr dirty="0"/>
-              <a:t>with</a:t>
-            </a:r>
-            <a:r>
-              <a:rPr spc="-75" dirty="0"/>
-              <a:t> </a:t>
-            </a:r>
-            <a:r>
-              <a:rPr dirty="0"/>
-              <a:t>Heat</a:t>
-            </a:r>
-            <a:r>
-              <a:rPr spc="-70" dirty="0"/>
-              <a:t> </a:t>
-            </a:r>
-            <a:r>
-              <a:rPr spc="-20" dirty="0"/>
-              <a:t>Load</a:t>
-            </a:r>
-          </a:p>
-        </p:txBody>
-      </p:sp>
-      <p:pic>
-        <p:nvPicPr>
-          <p:cNvPr id="5" name="object 5"/>
-          <p:cNvPicPr/>
-          <p:nvPr/>
-        </p:nvPicPr>
-        <p:blipFill>
-          <a:blip r:embed="rId4" cstate="print"/>
-          <a:stretch>
-            <a:fillRect/>
-          </a:stretch>
-        </p:blipFill>
-        <p:spPr>
-          <a:xfrm>
-            <a:off x="6642100" y="2984500"/>
-            <a:ext cx="5168900" cy="4737100"/>
-          </a:xfrm>
-          <a:prstGeom prst="rect">
-            <a:avLst/>
-          </a:prstGeom>
-        </p:spPr>
-      </p:pic>
-      <p:sp>
-        <p:nvSpPr>
-          <p:cNvPr id="7" name="object 7"/>
-          <p:cNvSpPr txBox="1"/>
-          <p:nvPr/>
-        </p:nvSpPr>
-        <p:spPr>
-          <a:xfrm>
-            <a:off x="9766300" y="1295400"/>
-            <a:ext cx="1279525" cy="391160"/>
-          </a:xfrm>
-          <a:prstGeom prst="rect">
-            <a:avLst/>
-          </a:prstGeom>
-        </p:spPr>
-        <p:txBody>
-          <a:bodyPr vert="horz" wrap="square" lIns="0" tIns="12700" rIns="0" bIns="0" rtlCol="0">
-            <a:spAutoFit/>
-          </a:bodyPr>
-          <a:lstStyle/>
-          <a:p>
-            <a:pPr marL="12700">
-              <a:lnSpc>
-                <a:spcPct val="100000"/>
-              </a:lnSpc>
-              <a:spcBef>
-                <a:spcPts val="100"/>
-              </a:spcBef>
-            </a:pPr>
-            <a:r>
-              <a:rPr sz="2400" dirty="0">
-                <a:latin typeface="Arial MT"/>
-                <a:cs typeface="Arial MT"/>
-              </a:rPr>
-              <a:t>Slit</a:t>
-            </a:r>
-            <a:r>
-              <a:rPr sz="2400" spc="-40" dirty="0">
-                <a:latin typeface="Arial MT"/>
-                <a:cs typeface="Arial MT"/>
-              </a:rPr>
-              <a:t> </a:t>
-            </a:r>
-            <a:r>
-              <a:rPr sz="2400" spc="-10" dirty="0">
-                <a:latin typeface="Arial MT"/>
-                <a:cs typeface="Arial MT"/>
-              </a:rPr>
-              <a:t>plane</a:t>
-            </a:r>
-            <a:endParaRPr sz="2400">
-              <a:latin typeface="Arial MT"/>
-              <a:cs typeface="Arial MT"/>
-            </a:endParaRPr>
-          </a:p>
-        </p:txBody>
-      </p:sp>
-      <p:grpSp>
-        <p:nvGrpSpPr>
-          <p:cNvPr id="8" name="object 8"/>
-          <p:cNvGrpSpPr/>
-          <p:nvPr/>
-        </p:nvGrpSpPr>
-        <p:grpSpPr>
-          <a:xfrm>
-            <a:off x="599803" y="3092695"/>
-            <a:ext cx="4594225" cy="3788410"/>
-            <a:chOff x="599803" y="3092695"/>
-            <a:chExt cx="4594225" cy="3788410"/>
-          </a:xfrm>
-        </p:grpSpPr>
-        <p:pic>
-          <p:nvPicPr>
-            <p:cNvPr id="9" name="object 9"/>
-            <p:cNvPicPr/>
-            <p:nvPr/>
-          </p:nvPicPr>
-          <p:blipFill>
-            <a:blip r:embed="rId5" cstate="print"/>
-            <a:stretch>
-              <a:fillRect/>
-            </a:stretch>
-          </p:blipFill>
-          <p:spPr>
-            <a:xfrm>
-              <a:off x="599803" y="4053529"/>
-              <a:ext cx="3257945" cy="2827143"/>
-            </a:xfrm>
-            <a:prstGeom prst="rect">
-              <a:avLst/>
-            </a:prstGeom>
-          </p:spPr>
-        </p:pic>
-        <p:sp>
-          <p:nvSpPr>
-            <p:cNvPr id="10" name="object 10"/>
-            <p:cNvSpPr/>
-            <p:nvPr/>
-          </p:nvSpPr>
-          <p:spPr>
-            <a:xfrm>
-              <a:off x="3088735" y="3206365"/>
-              <a:ext cx="1955164" cy="1484630"/>
-            </a:xfrm>
-            <a:custGeom>
-              <a:avLst/>
-              <a:gdLst/>
-              <a:ahLst/>
-              <a:cxnLst/>
-              <a:rect l="l" t="t" r="r" b="b"/>
-              <a:pathLst>
-                <a:path w="1955164" h="1484629">
-                  <a:moveTo>
-                    <a:pt x="0" y="1484604"/>
-                  </a:moveTo>
-                  <a:lnTo>
-                    <a:pt x="1934839" y="15360"/>
-                  </a:lnTo>
-                  <a:lnTo>
-                    <a:pt x="1955067" y="0"/>
-                  </a:lnTo>
-                </a:path>
-              </a:pathLst>
-            </a:custGeom>
-            <a:ln w="50800">
-              <a:solidFill>
-                <a:srgbClr val="000000"/>
-              </a:solidFill>
-            </a:ln>
-          </p:spPr>
-          <p:txBody>
-            <a:bodyPr wrap="square" lIns="0" tIns="0" rIns="0" bIns="0" rtlCol="0"/>
-            <a:lstStyle/>
-            <a:p>
-              <a:endParaRPr/>
-            </a:p>
-          </p:txBody>
-        </p:sp>
-        <p:sp>
-          <p:nvSpPr>
-            <p:cNvPr id="11" name="object 11"/>
-            <p:cNvSpPr/>
-            <p:nvPr/>
-          </p:nvSpPr>
-          <p:spPr>
-            <a:xfrm>
-              <a:off x="4959057" y="3092695"/>
-              <a:ext cx="234950" cy="213995"/>
-            </a:xfrm>
-            <a:custGeom>
-              <a:avLst/>
-              <a:gdLst/>
-              <a:ahLst/>
-              <a:cxnLst/>
-              <a:rect l="l" t="t" r="r" b="b"/>
-              <a:pathLst>
-                <a:path w="234950" h="213995">
-                  <a:moveTo>
-                    <a:pt x="234436" y="0"/>
-                  </a:moveTo>
-                  <a:lnTo>
-                    <a:pt x="0" y="44070"/>
-                  </a:lnTo>
-                  <a:lnTo>
-                    <a:pt x="129032" y="213992"/>
-                  </a:lnTo>
-                  <a:lnTo>
-                    <a:pt x="234436" y="0"/>
-                  </a:lnTo>
-                  <a:close/>
-                </a:path>
-              </a:pathLst>
-            </a:custGeom>
-            <a:solidFill>
-              <a:srgbClr val="000000"/>
-            </a:solidFill>
-          </p:spPr>
-          <p:txBody>
-            <a:bodyPr wrap="square" lIns="0" tIns="0" rIns="0" bIns="0" rtlCol="0"/>
-            <a:lstStyle/>
-            <a:p>
-              <a:endParaRPr/>
-            </a:p>
-          </p:txBody>
-        </p:sp>
-      </p:grpSp>
-      <p:pic>
-        <p:nvPicPr>
-          <p:cNvPr id="12" name="object 12"/>
-          <p:cNvPicPr/>
-          <p:nvPr/>
-        </p:nvPicPr>
-        <p:blipFill>
-          <a:blip r:embed="rId6" cstate="print"/>
-          <a:stretch>
-            <a:fillRect/>
-          </a:stretch>
-        </p:blipFill>
-        <p:spPr>
-          <a:xfrm>
-            <a:off x="2908300" y="8331200"/>
-            <a:ext cx="3807858" cy="1003300"/>
-          </a:xfrm>
-          <a:prstGeom prst="rect">
-            <a:avLst/>
-          </a:prstGeom>
-        </p:spPr>
-      </p:pic>
-      <p:sp>
-        <p:nvSpPr>
-          <p:cNvPr id="13" name="object 13"/>
-          <p:cNvSpPr txBox="1"/>
-          <p:nvPr/>
-        </p:nvSpPr>
-        <p:spPr>
-          <a:xfrm>
-            <a:off x="4749800" y="7747000"/>
-            <a:ext cx="1059180" cy="391160"/>
-          </a:xfrm>
-          <a:prstGeom prst="rect">
-            <a:avLst/>
-          </a:prstGeom>
-        </p:spPr>
-        <p:txBody>
-          <a:bodyPr vert="horz" wrap="square" lIns="0" tIns="12700" rIns="0" bIns="0" rtlCol="0">
-            <a:spAutoFit/>
-          </a:bodyPr>
-          <a:lstStyle/>
-          <a:p>
-            <a:pPr marL="12700">
-              <a:lnSpc>
-                <a:spcPct val="100000"/>
-              </a:lnSpc>
-              <a:spcBef>
-                <a:spcPts val="100"/>
-              </a:spcBef>
-            </a:pPr>
-            <a:r>
-              <a:rPr sz="2400" spc="-10" dirty="0">
-                <a:latin typeface="Arial MT"/>
-                <a:cs typeface="Arial MT"/>
-              </a:rPr>
-              <a:t>Without</a:t>
-            </a:r>
-            <a:endParaRPr sz="2400">
-              <a:latin typeface="Arial MT"/>
-              <a:cs typeface="Arial MT"/>
-            </a:endParaRPr>
-          </a:p>
-        </p:txBody>
-      </p:sp>
-      <p:pic>
-        <p:nvPicPr>
-          <p:cNvPr id="14" name="object 14"/>
-          <p:cNvPicPr/>
-          <p:nvPr/>
-        </p:nvPicPr>
-        <p:blipFill>
-          <a:blip r:embed="rId7" cstate="print"/>
-          <a:stretch>
-            <a:fillRect/>
-          </a:stretch>
-        </p:blipFill>
-        <p:spPr>
-          <a:xfrm>
-            <a:off x="7867234" y="8369300"/>
-            <a:ext cx="3804065" cy="939800"/>
-          </a:xfrm>
-          <a:prstGeom prst="rect">
-            <a:avLst/>
-          </a:prstGeom>
-        </p:spPr>
-      </p:pic>
-      <p:sp>
-        <p:nvSpPr>
-          <p:cNvPr id="15" name="object 15"/>
-          <p:cNvSpPr txBox="1"/>
-          <p:nvPr/>
-        </p:nvSpPr>
-        <p:spPr>
-          <a:xfrm>
-            <a:off x="9118600" y="7772400"/>
-            <a:ext cx="635000" cy="391160"/>
-          </a:xfrm>
-          <a:prstGeom prst="rect">
-            <a:avLst/>
-          </a:prstGeom>
-        </p:spPr>
-        <p:txBody>
-          <a:bodyPr vert="horz" wrap="square" lIns="0" tIns="12700" rIns="0" bIns="0" rtlCol="0">
-            <a:spAutoFit/>
-          </a:bodyPr>
-          <a:lstStyle/>
-          <a:p>
-            <a:pPr marL="12700">
-              <a:lnSpc>
-                <a:spcPct val="100000"/>
-              </a:lnSpc>
-              <a:spcBef>
-                <a:spcPts val="100"/>
-              </a:spcBef>
-            </a:pPr>
-            <a:r>
-              <a:rPr sz="2400" spc="-20" dirty="0">
-                <a:latin typeface="Arial MT"/>
-                <a:cs typeface="Arial MT"/>
-              </a:rPr>
-              <a:t>With</a:t>
-            </a:r>
-            <a:endParaRPr sz="2400">
-              <a:latin typeface="Arial MT"/>
-              <a:cs typeface="Arial MT"/>
-            </a:endParaRPr>
-          </a:p>
-        </p:txBody>
-      </p:sp>
-      <p:sp>
-        <p:nvSpPr>
-          <p:cNvPr id="16" name="object 16"/>
-          <p:cNvSpPr txBox="1">
-            <a:spLocks noGrp="1"/>
-          </p:cNvSpPr>
-          <p:nvPr>
-            <p:ph type="ftr" sz="quarter" idx="5"/>
-          </p:nvPr>
-        </p:nvSpPr>
-        <p:spPr>
-          <a:prstGeom prst="rect">
-            <a:avLst/>
-          </a:prstGeom>
-        </p:spPr>
-        <p:txBody>
-          <a:bodyPr vert="horz" wrap="square" lIns="0" tIns="2540" rIns="0" bIns="0" rtlCol="0">
-            <a:spAutoFit/>
-          </a:bodyPr>
-          <a:lstStyle/>
-          <a:p>
-            <a:pPr marL="12700">
-              <a:lnSpc>
-                <a:spcPct val="100000"/>
-              </a:lnSpc>
-              <a:spcBef>
-                <a:spcPts val="20"/>
-              </a:spcBef>
-            </a:pPr>
-            <a:r>
-              <a:rPr spc="-10" dirty="0"/>
-              <a:t>Software</a:t>
-            </a:r>
-            <a:r>
-              <a:rPr spc="-50" dirty="0"/>
-              <a:t> </a:t>
-            </a:r>
-            <a:r>
-              <a:rPr dirty="0"/>
-              <a:t>for</a:t>
-            </a:r>
-            <a:r>
-              <a:rPr spc="-45" dirty="0"/>
-              <a:t> </a:t>
-            </a:r>
-            <a:r>
-              <a:rPr dirty="0"/>
-              <a:t>Optical</a:t>
-            </a:r>
-            <a:r>
-              <a:rPr spc="-45" dirty="0"/>
-              <a:t> </a:t>
-            </a:r>
-            <a:r>
-              <a:rPr dirty="0"/>
-              <a:t>Simulations,</a:t>
-            </a:r>
-            <a:r>
-              <a:rPr spc="-45" dirty="0"/>
-              <a:t> </a:t>
-            </a:r>
-            <a:r>
-              <a:rPr spc="-20" dirty="0"/>
-              <a:t>Trieste,</a:t>
-            </a:r>
-            <a:r>
-              <a:rPr spc="-45" dirty="0"/>
-              <a:t> </a:t>
-            </a:r>
-            <a:r>
-              <a:rPr dirty="0"/>
-              <a:t>October</a:t>
-            </a:r>
-            <a:r>
-              <a:rPr spc="-45" dirty="0"/>
-              <a:t> </a:t>
-            </a:r>
-            <a:r>
-              <a:rPr dirty="0"/>
-              <a:t>2016.</a:t>
-            </a:r>
-            <a:r>
-              <a:rPr spc="-45" dirty="0"/>
-              <a:t> </a:t>
-            </a:r>
-            <a:r>
-              <a:rPr dirty="0"/>
-              <a:t>Ruben</a:t>
-            </a:r>
-            <a:r>
-              <a:rPr spc="-45" dirty="0"/>
-              <a:t> </a:t>
-            </a:r>
-            <a:r>
-              <a:rPr spc="-10" dirty="0"/>
-              <a:t>Reininger</a:t>
-            </a:r>
-          </a:p>
-        </p:txBody>
-      </p:sp>
-      <p:sp>
-        <p:nvSpPr>
-          <p:cNvPr id="17" name="object 17"/>
-          <p:cNvSpPr txBox="1">
-            <a:spLocks noGrp="1"/>
-          </p:cNvSpPr>
-          <p:nvPr>
-            <p:ph type="sldNum" sz="quarter" idx="7"/>
-          </p:nvPr>
-        </p:nvSpPr>
-        <p:spPr>
-          <a:prstGeom prst="rect">
-            <a:avLst/>
-          </a:prstGeom>
-        </p:spPr>
-        <p:txBody>
-          <a:bodyPr vert="horz" wrap="square" lIns="0" tIns="3810" rIns="0" bIns="0" rtlCol="0">
-            <a:spAutoFit/>
-          </a:bodyPr>
-          <a:lstStyle/>
-          <a:p>
-            <a:pPr marL="38100">
-              <a:lnSpc>
-                <a:spcPct val="100000"/>
-              </a:lnSpc>
-              <a:spcBef>
-                <a:spcPts val="30"/>
-              </a:spcBef>
-            </a:pPr>
-            <a:fld id="{81D60167-4931-47E6-BA6A-407CBD079E47}" type="slidenum">
-              <a:rPr spc="-25" dirty="0"/>
-              <a:t>41</a:t>
-            </a:fld>
-            <a:endParaRPr spc="-25" dirty="0"/>
-          </a:p>
-        </p:txBody>
-      </p:sp>
-      <p:sp>
-        <p:nvSpPr>
-          <p:cNvPr id="18" name="object 18"/>
-          <p:cNvSpPr txBox="1"/>
-          <p:nvPr/>
-        </p:nvSpPr>
-        <p:spPr>
-          <a:xfrm>
-            <a:off x="1069339" y="9384967"/>
-            <a:ext cx="72390" cy="211454"/>
-          </a:xfrm>
-          <a:prstGeom prst="rect">
-            <a:avLst/>
-          </a:prstGeom>
-        </p:spPr>
-        <p:txBody>
-          <a:bodyPr vert="horz" wrap="square" lIns="0" tIns="5080" rIns="0" bIns="0" rtlCol="0">
-            <a:spAutoFit/>
-          </a:bodyPr>
-          <a:lstStyle/>
-          <a:p>
-            <a:pPr marL="12700">
-              <a:lnSpc>
-                <a:spcPct val="100000"/>
-              </a:lnSpc>
-              <a:spcBef>
-                <a:spcPts val="40"/>
-              </a:spcBef>
-            </a:pPr>
-            <a:r>
-              <a:rPr sz="1200" spc="-50" dirty="0">
-                <a:solidFill>
-                  <a:srgbClr val="275D90"/>
-                </a:solidFill>
-                <a:latin typeface="Calibri"/>
-                <a:cs typeface="Calibri"/>
-              </a:rPr>
-              <a:t>-</a:t>
-            </a:r>
-            <a:endParaRPr sz="1200">
-              <a:latin typeface="Calibri"/>
-              <a:cs typeface="Calibri"/>
-            </a:endParaRPr>
+            <a:r>
+              <a:rPr lang="en-GB" dirty="0"/>
+              <a:t>06_FVLSPGM1000eVc2M2WithWithout.ows</a:t>
+            </a:r>
           </a:p>
         </p:txBody>
       </p:sp>
@@ -47359,7 +45394,7 @@
 </p:sld>
 </file>
 
-<file path=ppt/slides/slide42.xml><?xml version="1.0" encoding="utf-8"?>
+<file path=ppt/slides/slide41.xml><?xml version="1.0" encoding="utf-8"?>
 <p:sld xmlns:a="http://schemas.openxmlformats.org/drawingml/2006/main" xmlns:r="http://schemas.openxmlformats.org/officeDocument/2006/relationships" xmlns:p="http://schemas.openxmlformats.org/presentationml/2006/main">
   <p:cSld>
     <p:spTree>
@@ -49839,7 +47874,7 @@
             </a:pPr>
             <a:fld id="{81D60167-4931-47E6-BA6A-407CBD079E47}" type="slidenum">
               <a:rPr spc="-25" dirty="0"/>
-              <a:t>42</a:t>
+              <a:t>41</a:t>
             </a:fld>
             <a:endParaRPr spc="-25" dirty="0"/>
           </a:p>
@@ -50476,7 +48511,7 @@
 </p:sld>
 </file>
 
-<file path=ppt/slides/slide43.xml><?xml version="1.0" encoding="utf-8"?>
+<file path=ppt/slides/slide42.xml><?xml version="1.0" encoding="utf-8"?>
 <p:sld xmlns:a="http://schemas.openxmlformats.org/drawingml/2006/main" xmlns:r="http://schemas.openxmlformats.org/officeDocument/2006/relationships" xmlns:p="http://schemas.openxmlformats.org/presentationml/2006/main">
   <p:cSld>
     <p:spTree>
@@ -50868,7 +48903,7 @@
             </a:pPr>
             <a:fld id="{81D60167-4931-47E6-BA6A-407CBD079E47}" type="slidenum">
               <a:rPr spc="-25" dirty="0"/>
-              <a:t>43</a:t>
+              <a:t>42</a:t>
             </a:fld>
             <a:endParaRPr spc="-25" dirty="0"/>
           </a:p>
@@ -51027,6 +49062,40 @@
           </a:p>
         </p:txBody>
       </p:sp>
+      <p:sp>
+        <p:nvSpPr>
+          <p:cNvPr id="15" name="Rectangle 14">
+            <a:extLst>
+              <a:ext uri="{FF2B5EF4-FFF2-40B4-BE49-F238E27FC236}">
+                <a16:creationId xmlns:a16="http://schemas.microsoft.com/office/drawing/2014/main" id="{94402B86-1E86-4954-B834-26651B65C946}"/>
+              </a:ext>
+            </a:extLst>
+          </p:cNvPr>
+          <p:cNvSpPr/>
+          <p:nvPr/>
+        </p:nvSpPr>
+        <p:spPr>
+          <a:xfrm>
+            <a:off x="19065" y="18782"/>
+            <a:ext cx="4750018" cy="369332"/>
+          </a:xfrm>
+          <a:prstGeom prst="rect">
+            <a:avLst/>
+          </a:prstGeom>
+        </p:spPr>
+        <p:txBody>
+          <a:bodyPr wrap="none">
+            <a:spAutoFit/>
+          </a:bodyPr>
+          <a:lstStyle/>
+          <a:p>
+            <a:r>
+              <a:rPr lang="en-GB" dirty="0"/>
+              <a:t>06_FVLSPGM1000eVc2M2WithWithout.ows</a:t>
+            </a:r>
+          </a:p>
+        </p:txBody>
+      </p:sp>
     </p:spTree>
   </p:cSld>
   <p:clrMapOvr>
@@ -51035,7 +49104,7 @@
 </p:sld>
 </file>
 
-<file path=ppt/slides/slide44.xml><?xml version="1.0" encoding="utf-8"?>
+<file path=ppt/slides/slide43.xml><?xml version="1.0" encoding="utf-8"?>
 <p:sld xmlns:a="http://schemas.openxmlformats.org/drawingml/2006/main" xmlns:r="http://schemas.openxmlformats.org/officeDocument/2006/relationships" xmlns:p="http://schemas.openxmlformats.org/presentationml/2006/main">
   <p:cSld>
     <p:spTree>
@@ -51571,7 +49640,7 @@
             </a:pPr>
             <a:fld id="{81D60167-4931-47E6-BA6A-407CBD079E47}" type="slidenum">
               <a:rPr spc="-25" dirty="0"/>
-              <a:t>44</a:t>
+              <a:t>43</a:t>
             </a:fld>
             <a:endParaRPr spc="-25" dirty="0"/>
           </a:p>
@@ -51759,8 +49828,8 @@
         </p:nvSpPr>
         <p:spPr>
           <a:xfrm>
-            <a:off x="5448300" y="8864600"/>
-            <a:ext cx="2834005" cy="299720"/>
+            <a:off x="5816600" y="8899993"/>
+            <a:ext cx="2278454" cy="289823"/>
           </a:xfrm>
           <a:prstGeom prst="rect">
             <a:avLst/>
@@ -51781,11 +49850,46 @@
               </a:spcBef>
             </a:pPr>
             <a:r>
+              <a:rPr sz="1800" err="1">
+                <a:latin typeface="Arial MT"/>
+                <a:cs typeface="Arial MT"/>
+              </a:rPr>
+              <a:t>R</a:t>
+            </a:r>
+            <a:r>
+              <a:rPr sz="1800">
+                <a:latin typeface="Arial MT"/>
+                <a:cs typeface="Arial MT"/>
+              </a:rPr>
+              <a:t>.</a:t>
+            </a:r>
+            <a:r>
+              <a:rPr lang="en-US" sz="1800">
+                <a:latin typeface="Arial MT"/>
+                <a:cs typeface="Arial MT"/>
+              </a:rPr>
+              <a:t> </a:t>
+            </a:r>
+            <a:r>
+              <a:rPr sz="1800">
+                <a:latin typeface="Arial MT"/>
+                <a:cs typeface="Arial MT"/>
+              </a:rPr>
+              <a:t>R</a:t>
+            </a:r>
+            <a:r>
+              <a:rPr lang="en-US" sz="1800" dirty="0" err="1">
+                <a:latin typeface="Arial MT"/>
+                <a:cs typeface="Arial MT"/>
+              </a:rPr>
+              <a:t>eininger</a:t>
+            </a:r>
+            <a:r>
               <a:rPr sz="1800" dirty="0">
                 <a:latin typeface="Arial MT"/>
                 <a:cs typeface="Arial MT"/>
               </a:rPr>
-              <a:t>R.R,</a:t>
+              <a:t>,</a:t>
             </a:r>
             <a:r>
               <a:rPr sz="1800" spc="-20" dirty="0">
@@ -51795,69 +49899,13 @@
               <a:t> </a:t>
             </a:r>
             <a:r>
-              <a:rPr sz="1800" dirty="0">
-                <a:latin typeface="Arial MT"/>
-                <a:cs typeface="Arial MT"/>
-              </a:rPr>
-              <a:t>NIM</a:t>
-            </a:r>
-            <a:r>
-              <a:rPr sz="1800" spc="-105" dirty="0">
-                <a:latin typeface="Arial MT"/>
-                <a:cs typeface="Arial MT"/>
-              </a:rPr>
-              <a:t> </a:t>
-            </a:r>
-            <a:r>
-              <a:rPr sz="1800" dirty="0">
-                <a:latin typeface="Arial MT"/>
-                <a:cs typeface="Arial MT"/>
-              </a:rPr>
-              <a:t>A</a:t>
-            </a:r>
-            <a:r>
-              <a:rPr sz="1800" spc="-110" dirty="0">
-                <a:latin typeface="Arial MT"/>
-                <a:cs typeface="Arial MT"/>
-              </a:rPr>
-              <a:t> </a:t>
-            </a:r>
-            <a:r>
-              <a:rPr sz="1800" dirty="0">
-                <a:latin typeface="Arial MT"/>
-                <a:cs typeface="Arial MT"/>
-              </a:rPr>
-              <a:t>649,</a:t>
-            </a:r>
-            <a:r>
-              <a:rPr sz="1800" spc="-15" dirty="0">
-                <a:latin typeface="Arial MT"/>
-                <a:cs typeface="Arial MT"/>
-              </a:rPr>
-              <a:t> </a:t>
-            </a:r>
-            <a:r>
-              <a:rPr sz="1800" dirty="0">
-                <a:latin typeface="Arial MT"/>
-                <a:cs typeface="Arial MT"/>
-              </a:rPr>
-              <a:t>139</a:t>
-            </a:r>
-            <a:r>
-              <a:rPr sz="1800" spc="-15" dirty="0">
-                <a:latin typeface="Arial MT"/>
-                <a:cs typeface="Arial MT"/>
-              </a:rPr>
-              <a:t> </a:t>
-            </a:r>
-            <a:r>
               <a:rPr sz="1800" spc="-10" dirty="0">
                 <a:latin typeface="Arial MT"/>
                 <a:cs typeface="Arial MT"/>
               </a:rPr>
               <a:t>(2010)</a:t>
             </a:r>
-            <a:endParaRPr sz="1800">
+            <a:endParaRPr sz="1800" dirty="0">
               <a:latin typeface="Arial MT"/>
               <a:cs typeface="Arial MT"/>
             </a:endParaRPr>
@@ -51872,7 +49920,7 @@
 </p:sld>
 </file>
 
-<file path=ppt/slides/slide45.xml><?xml version="1.0" encoding="utf-8"?>
+<file path=ppt/slides/slide44.xml><?xml version="1.0" encoding="utf-8"?>
 <p:sld xmlns:a="http://schemas.openxmlformats.org/drawingml/2006/main" xmlns:r="http://schemas.openxmlformats.org/officeDocument/2006/relationships" xmlns:p="http://schemas.openxmlformats.org/presentationml/2006/main">
   <p:cSld>
     <p:spTree>
@@ -53419,7 +51467,7 @@
             </a:pPr>
             <a:fld id="{81D60167-4931-47E6-BA6A-407CBD079E47}" type="slidenum">
               <a:rPr spc="-25" dirty="0"/>
-              <a:t>45</a:t>
+              <a:t>44</a:t>
             </a:fld>
             <a:endParaRPr spc="-25" dirty="0"/>
           </a:p>

--- a/gratings/grating_simulations_reininger.pptx
+++ b/gratings/grating_simulations_reininger.pptx
@@ -354,7 +354,7 @@
           <a:p>
             <a:fld id="{1D8BD707-D9CF-40AE-B4C6-C98DA3205C09}" type="datetimeFigureOut">
               <a:rPr lang="en-US"/>
-              <a:t>20/04/2026</a:t>
+              <a:t>19/05/2026</a:t>
             </a:fld>
             <a:endParaRPr lang="en-US"/>
           </a:p>
@@ -615,7 +615,7 @@
           <a:p>
             <a:fld id="{1D8BD707-D9CF-40AE-B4C6-C98DA3205C09}" type="datetimeFigureOut">
               <a:rPr lang="en-US"/>
-              <a:t>20/04/2026</a:t>
+              <a:t>19/05/2026</a:t>
             </a:fld>
             <a:endParaRPr lang="en-US"/>
           </a:p>
@@ -913,7 +913,7 @@
           <a:p>
             <a:fld id="{1D8BD707-D9CF-40AE-B4C6-C98DA3205C09}" type="datetimeFigureOut">
               <a:rPr lang="en-US"/>
-              <a:t>20/04/2026</a:t>
+              <a:t>19/05/2026</a:t>
             </a:fld>
             <a:endParaRPr lang="en-US"/>
           </a:p>
@@ -1153,7 +1153,7 @@
           <a:p>
             <a:fld id="{1D8BD707-D9CF-40AE-B4C6-C98DA3205C09}" type="datetimeFigureOut">
               <a:rPr lang="en-US"/>
-              <a:t>20/04/2026</a:t>
+              <a:t>19/05/2026</a:t>
             </a:fld>
             <a:endParaRPr lang="en-US"/>
           </a:p>
@@ -1356,7 +1356,7 @@
           <a:p>
             <a:fld id="{1D8BD707-D9CF-40AE-B4C6-C98DA3205C09}" type="datetimeFigureOut">
               <a:rPr lang="en-US"/>
-              <a:t>20/04/2026</a:t>
+              <a:t>19/05/2026</a:t>
             </a:fld>
             <a:endParaRPr lang="en-US"/>
           </a:p>
@@ -1687,7 +1687,7 @@
           <a:p>
             <a:fld id="{1D8BD707-D9CF-40AE-B4C6-C98DA3205C09}" type="datetimeFigureOut">
               <a:rPr lang="en-US"/>
-              <a:t>20/04/2026</a:t>
+              <a:t>19/05/2026</a:t>
             </a:fld>
             <a:endParaRPr lang="en-US"/>
           </a:p>
@@ -31926,220 +31926,6 @@
       </p:sp>
       <p:sp>
         <p:nvSpPr>
-          <p:cNvPr id="9" name="object 9"/>
-          <p:cNvSpPr txBox="1"/>
-          <p:nvPr/>
-        </p:nvSpPr>
-        <p:spPr>
-          <a:xfrm>
-            <a:off x="11412958" y="6419047"/>
-            <a:ext cx="1550035" cy="3244477"/>
-          </a:xfrm>
-          <a:prstGeom prst="rect">
-            <a:avLst/>
-          </a:prstGeom>
-        </p:spPr>
-        <p:txBody>
-          <a:bodyPr vert="horz" wrap="square" lIns="0" tIns="33019" rIns="0" bIns="0" rtlCol="0">
-            <a:spAutoFit/>
-          </a:bodyPr>
-          <a:lstStyle/>
-          <a:p>
-            <a:pPr marL="12700" marR="280670">
-              <a:lnSpc>
-                <a:spcPts val="2800"/>
-              </a:lnSpc>
-              <a:spcBef>
-                <a:spcPts val="259"/>
-              </a:spcBef>
-            </a:pPr>
-            <a:r>
-              <a:rPr sz="1600" dirty="0">
-                <a:latin typeface="Arial MT"/>
-                <a:cs typeface="Arial MT"/>
-              </a:rPr>
-              <a:t>With</a:t>
-            </a:r>
-            <a:r>
-              <a:rPr sz="1600" spc="-30" dirty="0">
-                <a:latin typeface="Arial MT"/>
-                <a:cs typeface="Arial MT"/>
-              </a:rPr>
-              <a:t> </a:t>
-            </a:r>
-            <a:endParaRPr lang="en-US" sz="1600" spc="-30" dirty="0">
-              <a:latin typeface="Arial MT"/>
-              <a:cs typeface="Arial MT"/>
-            </a:endParaRPr>
-          </a:p>
-          <a:p>
-            <a:pPr marL="12700" marR="280670">
-              <a:lnSpc>
-                <a:spcPts val="2800"/>
-              </a:lnSpc>
-              <a:spcBef>
-                <a:spcPts val="259"/>
-              </a:spcBef>
-            </a:pPr>
-            <a:r>
-              <a:rPr sz="1600" spc="-25" dirty="0">
-                <a:latin typeface="Arial MT"/>
-                <a:cs typeface="Arial MT"/>
-              </a:rPr>
-              <a:t>S</a:t>
-            </a:r>
-            <a:r>
-              <a:rPr lang="en-US" sz="1600" spc="-25" dirty="0">
-                <a:latin typeface="Arial MT"/>
-                <a:cs typeface="Arial MT"/>
-              </a:rPr>
-              <a:t>lope </a:t>
-            </a:r>
-            <a:r>
-              <a:rPr sz="1600" spc="-25" dirty="0">
-                <a:latin typeface="Arial MT"/>
-                <a:cs typeface="Arial MT"/>
-              </a:rPr>
-              <a:t>E</a:t>
-            </a:r>
-            <a:r>
-              <a:rPr lang="en-US" sz="1600" spc="-25" dirty="0">
-                <a:latin typeface="Arial MT"/>
-                <a:cs typeface="Arial MT"/>
-              </a:rPr>
-              <a:t>rrors</a:t>
-            </a:r>
-            <a:r>
-              <a:rPr sz="1600" spc="-25" dirty="0">
-                <a:latin typeface="Arial MT"/>
-                <a:cs typeface="Arial MT"/>
-              </a:rPr>
-              <a:t> </a:t>
-            </a:r>
-            <a:r>
-              <a:rPr sz="1600" dirty="0">
-                <a:latin typeface="Arial MT"/>
-                <a:cs typeface="Arial MT"/>
-              </a:rPr>
-              <a:t>on</a:t>
-            </a:r>
-            <a:r>
-              <a:rPr sz="1600" spc="-75" dirty="0">
-                <a:latin typeface="Arial MT"/>
-                <a:cs typeface="Arial MT"/>
-              </a:rPr>
-              <a:t> </a:t>
-            </a:r>
-            <a:r>
-              <a:rPr sz="1600" spc="-55" dirty="0">
-                <a:latin typeface="Arial MT"/>
-                <a:cs typeface="Arial MT"/>
-              </a:rPr>
-              <a:t>Toroid</a:t>
-            </a:r>
-            <a:endParaRPr lang="en-US" sz="1600" spc="-55" dirty="0">
-              <a:latin typeface="Arial MT"/>
-              <a:cs typeface="Arial MT"/>
-            </a:endParaRPr>
-          </a:p>
-          <a:p>
-            <a:pPr marL="12700" marR="280670">
-              <a:lnSpc>
-                <a:spcPts val="2800"/>
-              </a:lnSpc>
-              <a:spcBef>
-                <a:spcPts val="259"/>
-              </a:spcBef>
-            </a:pPr>
-            <a:endParaRPr lang="en-US" sz="1600" spc="-55" dirty="0">
-              <a:latin typeface="Arial MT"/>
-              <a:cs typeface="Arial MT"/>
-            </a:endParaRPr>
-          </a:p>
-          <a:p>
-            <a:pPr marL="12700" marR="280670">
-              <a:lnSpc>
-                <a:spcPts val="2800"/>
-              </a:lnSpc>
-              <a:spcBef>
-                <a:spcPts val="259"/>
-              </a:spcBef>
-            </a:pPr>
-            <a:r>
-              <a:rPr lang="en-US" sz="1600" spc="-55" dirty="0">
-                <a:latin typeface="Arial MT"/>
-                <a:cs typeface="Arial MT"/>
-              </a:rPr>
-              <a:t>Without </a:t>
-            </a:r>
-          </a:p>
-          <a:p>
-            <a:pPr marL="12700" marR="280670">
-              <a:lnSpc>
-                <a:spcPts val="2800"/>
-              </a:lnSpc>
-              <a:spcBef>
-                <a:spcPts val="259"/>
-              </a:spcBef>
-            </a:pPr>
-            <a:r>
-              <a:rPr lang="en-US" sz="1600" spc="-55" dirty="0">
-                <a:latin typeface="Arial MT"/>
-                <a:cs typeface="Arial MT"/>
-              </a:rPr>
-              <a:t>Slope Errors </a:t>
-            </a:r>
-          </a:p>
-          <a:p>
-            <a:pPr marL="12700" marR="280670">
-              <a:lnSpc>
-                <a:spcPts val="2800"/>
-              </a:lnSpc>
-              <a:spcBef>
-                <a:spcPts val="259"/>
-              </a:spcBef>
-            </a:pPr>
-            <a:r>
-              <a:rPr lang="en-US" sz="1600" spc="-55" dirty="0">
-                <a:latin typeface="Arial MT"/>
-                <a:cs typeface="Arial MT"/>
-              </a:rPr>
-              <a:t>On Toroid</a:t>
-            </a:r>
-            <a:endParaRPr sz="1600" dirty="0">
-              <a:latin typeface="Arial MT"/>
-              <a:cs typeface="Arial MT"/>
-            </a:endParaRPr>
-          </a:p>
-          <a:p>
-            <a:pPr>
-              <a:lnSpc>
-                <a:spcPct val="100000"/>
-              </a:lnSpc>
-            </a:pPr>
-            <a:endParaRPr sz="1600" dirty="0">
-              <a:latin typeface="Arial MT"/>
-              <a:cs typeface="Arial MT"/>
-            </a:endParaRPr>
-          </a:p>
-          <a:p>
-            <a:pPr>
-              <a:lnSpc>
-                <a:spcPct val="100000"/>
-              </a:lnSpc>
-              <a:spcBef>
-                <a:spcPts val="80"/>
-              </a:spcBef>
-            </a:pPr>
-            <a:endParaRPr sz="1600" dirty="0">
-              <a:latin typeface="Arial MT"/>
-              <a:cs typeface="Arial MT"/>
-            </a:endParaRPr>
-          </a:p>
-        </p:txBody>
-      </p:sp>
-      <p:sp>
-        <p:nvSpPr>
           <p:cNvPr id="14" name="object 14"/>
           <p:cNvSpPr txBox="1">
             <a:spLocks noGrp="1"/>
@@ -32424,96 +32210,6 @@
           </a:fontRef>
         </p:style>
       </p:cxnSp>
-      <p:pic>
-        <p:nvPicPr>
-          <p:cNvPr id="4" name="Picture 3">
-            <a:extLst>
-              <a:ext uri="{FF2B5EF4-FFF2-40B4-BE49-F238E27FC236}">
-                <a16:creationId xmlns:a16="http://schemas.microsoft.com/office/drawing/2014/main" id="{42E22C17-503E-46B9-BACF-C3841A9B3F88}"/>
-              </a:ext>
-            </a:extLst>
-          </p:cNvPr>
-          <p:cNvPicPr>
-            <a:picLocks noChangeAspect="1"/>
-          </p:cNvPicPr>
-          <p:nvPr/>
-        </p:nvPicPr>
-        <p:blipFill>
-          <a:blip r:embed="rId5"/>
-          <a:stretch>
-            <a:fillRect/>
-          </a:stretch>
-        </p:blipFill>
-        <p:spPr>
-          <a:xfrm>
-            <a:off x="7183519" y="2216810"/>
-            <a:ext cx="4802148" cy="4067005"/>
-          </a:xfrm>
-          <a:prstGeom prst="rect">
-            <a:avLst/>
-          </a:prstGeom>
-        </p:spPr>
-      </p:pic>
-      <p:pic>
-        <p:nvPicPr>
-          <p:cNvPr id="5" name="Picture 4">
-            <a:extLst>
-              <a:ext uri="{FF2B5EF4-FFF2-40B4-BE49-F238E27FC236}">
-                <a16:creationId xmlns:a16="http://schemas.microsoft.com/office/drawing/2014/main" id="{4F798D18-29A6-4FAC-BB94-32BEE1E1DEBC}"/>
-              </a:ext>
-            </a:extLst>
-          </p:cNvPr>
-          <p:cNvPicPr>
-            <a:picLocks noChangeAspect="1"/>
-          </p:cNvPicPr>
-          <p:nvPr/>
-        </p:nvPicPr>
-        <p:blipFill>
-          <a:blip r:embed="rId6"/>
-          <a:stretch>
-            <a:fillRect/>
-          </a:stretch>
-        </p:blipFill>
-        <p:spPr>
-          <a:xfrm>
-            <a:off x="8026400" y="6605644"/>
-            <a:ext cx="3060311" cy="785756"/>
-          </a:xfrm>
-          <a:prstGeom prst="rect">
-            <a:avLst/>
-          </a:prstGeom>
-        </p:spPr>
-      </p:pic>
-      <p:pic>
-        <p:nvPicPr>
-          <p:cNvPr id="6" name="Picture 5">
-            <a:extLst>
-              <a:ext uri="{FF2B5EF4-FFF2-40B4-BE49-F238E27FC236}">
-                <a16:creationId xmlns:a16="http://schemas.microsoft.com/office/drawing/2014/main" id="{BDDF2CA3-2C32-4F4F-9DD1-F743D187BFE8}"/>
-              </a:ext>
-            </a:extLst>
-          </p:cNvPr>
-          <p:cNvPicPr>
-            <a:picLocks noChangeAspect="1"/>
-          </p:cNvPicPr>
-          <p:nvPr/>
-        </p:nvPicPr>
-        <p:blipFill>
-          <a:blip r:embed="rId7"/>
-          <a:stretch>
-            <a:fillRect/>
-          </a:stretch>
-        </p:blipFill>
-        <p:spPr>
-          <a:xfrm>
-            <a:off x="8070434" y="8065954"/>
-            <a:ext cx="3201226" cy="785756"/>
-          </a:xfrm>
-          <a:prstGeom prst="rect">
-            <a:avLst/>
-          </a:prstGeom>
-        </p:spPr>
-      </p:pic>
     </p:spTree>
     <p:extLst>
       <p:ext uri="{BB962C8B-B14F-4D97-AF65-F5344CB8AC3E}">
@@ -34955,6 +34651,217 @@
           </p:spPr>
         </p:pic>
       </p:grpSp>
+      <p:sp>
+        <p:nvSpPr>
+          <p:cNvPr id="43" name="object 13">
+            <a:extLst>
+              <a:ext uri="{FF2B5EF4-FFF2-40B4-BE49-F238E27FC236}">
+                <a16:creationId xmlns:a16="http://schemas.microsoft.com/office/drawing/2014/main" id="{46415788-0915-4648-989C-5558CACB2AFE}"/>
+              </a:ext>
+            </a:extLst>
+          </p:cNvPr>
+          <p:cNvSpPr txBox="1"/>
+          <p:nvPr/>
+        </p:nvSpPr>
+        <p:spPr>
+          <a:xfrm>
+            <a:off x="3318929" y="4959228"/>
+            <a:ext cx="6946899" cy="764312"/>
+          </a:xfrm>
+          <a:prstGeom prst="rect">
+            <a:avLst/>
+          </a:prstGeom>
+        </p:spPr>
+        <p:txBody>
+          <a:bodyPr vert="horz" wrap="square" lIns="0" tIns="12700" rIns="0" bIns="0" rtlCol="0">
+            <a:spAutoFit/>
+          </a:bodyPr>
+          <a:lstStyle/>
+          <a:p>
+            <a:pPr marL="12700">
+              <a:lnSpc>
+                <a:spcPct val="100000"/>
+              </a:lnSpc>
+              <a:spcBef>
+                <a:spcPts val="100"/>
+              </a:spcBef>
+            </a:pPr>
+            <a:r>
+              <a:rPr sz="2400" dirty="0">
+                <a:latin typeface="Arial MT"/>
+                <a:cs typeface="Arial MT"/>
+              </a:rPr>
+              <a:t>R.</a:t>
+            </a:r>
+            <a:r>
+              <a:rPr sz="2400" spc="-55" dirty="0">
+                <a:latin typeface="Arial MT"/>
+                <a:cs typeface="Arial MT"/>
+              </a:rPr>
+              <a:t> </a:t>
+            </a:r>
+            <a:r>
+              <a:rPr sz="2400" dirty="0">
+                <a:latin typeface="Arial MT"/>
+                <a:cs typeface="Arial MT"/>
+              </a:rPr>
+              <a:t>Follath</a:t>
+            </a:r>
+            <a:r>
+              <a:rPr sz="2400" spc="-35" dirty="0">
+                <a:latin typeface="Arial MT"/>
+                <a:cs typeface="Arial MT"/>
+              </a:rPr>
+              <a:t> </a:t>
+            </a:r>
+            <a:r>
+              <a:rPr sz="2400" dirty="0">
+                <a:latin typeface="Arial MT"/>
+                <a:cs typeface="Arial MT"/>
+              </a:rPr>
+              <a:t>and</a:t>
+            </a:r>
+            <a:r>
+              <a:rPr sz="2400" spc="-40" dirty="0">
+                <a:latin typeface="Arial MT"/>
+                <a:cs typeface="Arial MT"/>
+              </a:rPr>
+              <a:t> </a:t>
+            </a:r>
+            <a:r>
+              <a:rPr sz="2400" spc="-110" dirty="0">
+                <a:latin typeface="Arial MT"/>
+                <a:cs typeface="Arial MT"/>
+              </a:rPr>
+              <a:t>F.</a:t>
+            </a:r>
+            <a:r>
+              <a:rPr sz="2400" spc="-40" dirty="0">
+                <a:latin typeface="Arial MT"/>
+                <a:cs typeface="Arial MT"/>
+              </a:rPr>
+              <a:t> </a:t>
+            </a:r>
+            <a:r>
+              <a:rPr sz="2400" dirty="0">
+                <a:latin typeface="Arial MT"/>
+                <a:cs typeface="Arial MT"/>
+              </a:rPr>
+              <a:t>Senf,</a:t>
+            </a:r>
+            <a:r>
+              <a:rPr sz="2400" spc="-40" dirty="0">
+                <a:latin typeface="Arial MT"/>
+                <a:cs typeface="Arial MT"/>
+              </a:rPr>
+              <a:t> </a:t>
+            </a:r>
+            <a:r>
+              <a:rPr sz="2400" spc="-10" dirty="0">
+                <a:latin typeface="Arial MT"/>
+                <a:cs typeface="Arial MT"/>
+              </a:rPr>
+              <a:t>NIM</a:t>
+            </a:r>
+            <a:r>
+              <a:rPr sz="2400" spc="-155" dirty="0">
+                <a:latin typeface="Arial MT"/>
+                <a:cs typeface="Arial MT"/>
+              </a:rPr>
+              <a:t> </a:t>
+            </a:r>
+            <a:r>
+              <a:rPr sz="2400" dirty="0">
+                <a:latin typeface="Arial MT"/>
+                <a:cs typeface="Arial MT"/>
+              </a:rPr>
+              <a:t>A</a:t>
+            </a:r>
+            <a:r>
+              <a:rPr sz="2400" spc="-165" dirty="0">
+                <a:latin typeface="Arial MT"/>
+                <a:cs typeface="Arial MT"/>
+              </a:rPr>
+              <a:t> </a:t>
+            </a:r>
+            <a:r>
+              <a:rPr sz="2400" b="1" dirty="0">
+                <a:latin typeface="Arial"/>
+                <a:cs typeface="Arial"/>
+              </a:rPr>
+              <a:t>390</a:t>
+            </a:r>
+            <a:r>
+              <a:rPr sz="2400" dirty="0">
+                <a:latin typeface="Arial MT"/>
+                <a:cs typeface="Arial MT"/>
+              </a:rPr>
+              <a:t>,</a:t>
+            </a:r>
+            <a:r>
+              <a:rPr sz="2400" spc="-45" dirty="0">
+                <a:latin typeface="Arial MT"/>
+                <a:cs typeface="Arial MT"/>
+              </a:rPr>
+              <a:t> </a:t>
+            </a:r>
+            <a:r>
+              <a:rPr sz="2400" dirty="0">
+                <a:latin typeface="Arial MT"/>
+                <a:cs typeface="Arial MT"/>
+              </a:rPr>
+              <a:t>388</a:t>
+            </a:r>
+            <a:r>
+              <a:rPr sz="2400" spc="-35" dirty="0">
+                <a:latin typeface="Arial MT"/>
+                <a:cs typeface="Arial MT"/>
+              </a:rPr>
+              <a:t> </a:t>
+            </a:r>
+            <a:r>
+              <a:rPr sz="2400" spc="-10" dirty="0">
+                <a:latin typeface="Arial MT"/>
+                <a:cs typeface="Arial MT"/>
+              </a:rPr>
+              <a:t>(1997)</a:t>
+            </a:r>
+            <a:endParaRPr lang="en-US" sz="2400" spc="-10" dirty="0">
+              <a:latin typeface="Arial MT"/>
+              <a:cs typeface="Arial MT"/>
+            </a:endParaRPr>
+          </a:p>
+          <a:p>
+            <a:pPr marL="12700">
+              <a:lnSpc>
+                <a:spcPct val="100000"/>
+              </a:lnSpc>
+              <a:spcBef>
+                <a:spcPts val="100"/>
+              </a:spcBef>
+            </a:pPr>
+            <a:r>
+              <a:rPr lang="en-GB" sz="2400" dirty="0">
+                <a:latin typeface="Arial MT"/>
+                <a:cs typeface="Arial MT"/>
+                <a:hlinkClick r:id="rId4"/>
+              </a:rPr>
+              <a:t>https://doi.org/10.1016/S0168-9002(97)00401-4</a:t>
+            </a:r>
+            <a:r>
+              <a:rPr lang="en-GB" sz="2400" dirty="0">
+                <a:latin typeface="Arial MT"/>
+                <a:cs typeface="Arial MT"/>
+              </a:rPr>
+              <a:t> </a:t>
+            </a:r>
+            <a:endParaRPr sz="2400" dirty="0">
+              <a:latin typeface="Arial MT"/>
+              <a:cs typeface="Arial MT"/>
+            </a:endParaRPr>
+          </a:p>
+        </p:txBody>
+      </p:sp>
     </p:spTree>
   </p:cSld>
   <p:clrMapOvr>
@@ -38719,10 +38626,10 @@
       </p:pic>
       <p:sp>
         <p:nvSpPr>
-          <p:cNvPr id="49" name="object 8">
+          <p:cNvPr id="54" name="object 15">
             <a:extLst>
               <a:ext uri="{FF2B5EF4-FFF2-40B4-BE49-F238E27FC236}">
-                <a16:creationId xmlns:a16="http://schemas.microsoft.com/office/drawing/2014/main" id="{8E948CEE-81B5-4642-B7B1-D6CAFAB66718}"/>
+                <a16:creationId xmlns:a16="http://schemas.microsoft.com/office/drawing/2014/main" id="{8646E698-6D29-406B-82E7-C5C3EFB57F83}"/>
               </a:ext>
             </a:extLst>
           </p:cNvPr>
@@ -38731,8 +38638,8 @@
         </p:nvSpPr>
         <p:spPr>
           <a:xfrm>
-            <a:off x="11061700" y="3835400"/>
-            <a:ext cx="1126490" cy="391160"/>
+            <a:off x="9887164" y="6699964"/>
+            <a:ext cx="2307376" cy="382156"/>
           </a:xfrm>
           <a:prstGeom prst="rect">
             <a:avLst/>
@@ -38757,69 +38664,6 @@
                 <a:latin typeface="Arial MT"/>
                 <a:cs typeface="Arial MT"/>
               </a:rPr>
-              <a:t>With</a:t>
-            </a:r>
-            <a:r>
-              <a:rPr sz="2400" spc="-30" dirty="0">
-                <a:latin typeface="Arial MT"/>
-                <a:cs typeface="Arial MT"/>
-              </a:rPr>
-              <a:t> </a:t>
-            </a:r>
-            <a:r>
-              <a:rPr sz="2400" spc="-25" dirty="0">
-                <a:latin typeface="Arial MT"/>
-                <a:cs typeface="Arial MT"/>
-              </a:rPr>
-              <a:t>SE</a:t>
-            </a:r>
-            <a:endParaRPr sz="2400" dirty="0">
-              <a:latin typeface="Arial MT"/>
-              <a:cs typeface="Arial MT"/>
-            </a:endParaRPr>
-          </a:p>
-        </p:txBody>
-      </p:sp>
-      <p:sp>
-        <p:nvSpPr>
-          <p:cNvPr id="54" name="object 15">
-            <a:extLst>
-              <a:ext uri="{FF2B5EF4-FFF2-40B4-BE49-F238E27FC236}">
-                <a16:creationId xmlns:a16="http://schemas.microsoft.com/office/drawing/2014/main" id="{8646E698-6D29-406B-82E7-C5C3EFB57F83}"/>
-              </a:ext>
-            </a:extLst>
-          </p:cNvPr>
-          <p:cNvSpPr txBox="1"/>
-          <p:nvPr/>
-        </p:nvSpPr>
-        <p:spPr>
-          <a:xfrm>
-            <a:off x="11171555" y="6729150"/>
-            <a:ext cx="906780" cy="391160"/>
-          </a:xfrm>
-          <a:prstGeom prst="rect">
-            <a:avLst/>
-          </a:prstGeom>
-        </p:spPr>
-        <p:txBody>
-          <a:bodyPr vert="horz" wrap="square" lIns="0" tIns="12700" rIns="0" bIns="0" rtlCol="0">
-            <a:spAutoFit/>
-          </a:bodyPr>
-          <a:lstStyle/>
-          <a:p>
-            <a:pPr marL="12700">
-              <a:lnSpc>
-                <a:spcPct val="100000"/>
-              </a:lnSpc>
-              <a:spcBef>
-                <a:spcPts val="100"/>
-              </a:spcBef>
-            </a:pPr>
-            <a:r>
-              <a:rPr sz="2400" dirty="0">
-                <a:latin typeface="Arial MT"/>
-                <a:cs typeface="Arial MT"/>
-              </a:rPr>
               <a:t>No</a:t>
             </a:r>
             <a:r>
@@ -38830,11 +38674,11 @@
               <a:t> </a:t>
             </a:r>
             <a:r>
-              <a:rPr sz="2400" spc="-25" dirty="0">
+              <a:rPr lang="en-US" sz="2400" spc="-25" dirty="0">
                 <a:latin typeface="Arial MT"/>
                 <a:cs typeface="Arial MT"/>
               </a:rPr>
-              <a:t>SE</a:t>
+              <a:t>slope errors</a:t>
             </a:r>
             <a:endParaRPr sz="2400" dirty="0">
               <a:latin typeface="Arial MT"/>
@@ -39004,6 +38848,76 @@
             <a:endParaRPr sz="3600" baseline="3472">
               <a:latin typeface="Arial"/>
               <a:cs typeface="Arial"/>
+            </a:endParaRPr>
+          </a:p>
+        </p:txBody>
+      </p:sp>
+      <p:sp>
+        <p:nvSpPr>
+          <p:cNvPr id="4" name="TextBox 3">
+            <a:extLst>
+              <a:ext uri="{FF2B5EF4-FFF2-40B4-BE49-F238E27FC236}">
+                <a16:creationId xmlns:a16="http://schemas.microsoft.com/office/drawing/2014/main" id="{18A1184A-465C-47A0-B968-A3A4B6B0EFD6}"/>
+              </a:ext>
+            </a:extLst>
+          </p:cNvPr>
+          <p:cNvSpPr txBox="1"/>
+          <p:nvPr/>
+        </p:nvSpPr>
+        <p:spPr>
+          <a:xfrm>
+            <a:off x="9887164" y="3850651"/>
+            <a:ext cx="2492349" cy="461665"/>
+          </a:xfrm>
+          <a:prstGeom prst="rect">
+            <a:avLst/>
+          </a:prstGeom>
+          <a:noFill/>
+        </p:spPr>
+        <p:txBody>
+          <a:bodyPr wrap="none" rtlCol="0">
+            <a:spAutoFit/>
+          </a:bodyPr>
+          <a:lstStyle/>
+          <a:p>
+            <a:r>
+              <a:rPr lang="en-GB" sz="2400" dirty="0">
+                <a:latin typeface="Arial MT"/>
+                <a:cs typeface="Arial MT"/>
+              </a:rPr>
+              <a:t>With</a:t>
+            </a:r>
+            <a:r>
+              <a:rPr lang="en-GB" sz="2400" spc="-50" dirty="0">
+                <a:latin typeface="Arial MT"/>
+                <a:cs typeface="Arial MT"/>
+              </a:rPr>
+              <a:t> </a:t>
+            </a:r>
+            <a:r>
+              <a:rPr lang="en-GB" sz="2400" dirty="0">
+                <a:latin typeface="Arial MT"/>
+                <a:cs typeface="Arial MT"/>
+              </a:rPr>
+              <a:t>slope</a:t>
+            </a:r>
+            <a:r>
+              <a:rPr lang="en-GB" sz="2400" spc="-45" dirty="0">
+                <a:latin typeface="Arial MT"/>
+                <a:cs typeface="Arial MT"/>
+              </a:rPr>
+              <a:t> </a:t>
+            </a:r>
+            <a:r>
+              <a:rPr lang="en-GB" sz="2400" spc="-10" dirty="0">
+                <a:latin typeface="Arial MT"/>
+                <a:cs typeface="Arial MT"/>
+              </a:rPr>
+              <a:t>errors</a:t>
+            </a:r>
+            <a:endParaRPr lang="en-GB" sz="2400" dirty="0">
+              <a:latin typeface="Arial MT"/>
+              <a:cs typeface="Arial MT"/>
             </a:endParaRPr>
           </a:p>
         </p:txBody>
@@ -39443,8 +39357,8 @@
         </p:nvSpPr>
         <p:spPr>
           <a:xfrm>
-            <a:off x="9334500" y="5702300"/>
-            <a:ext cx="2752725" cy="391160"/>
+            <a:off x="9527858" y="5702300"/>
+            <a:ext cx="2512059" cy="391160"/>
           </a:xfrm>
           <a:prstGeom prst="rect">
             <a:avLst/>
@@ -39465,24 +39379,24 @@
               </a:spcBef>
             </a:pPr>
             <a:r>
+              <a:rPr lang="en-US" sz="2400" dirty="0">
+                <a:latin typeface="Arial MT"/>
+                <a:cs typeface="Arial MT"/>
+              </a:rPr>
+              <a:t>No</a:t>
+            </a:r>
+            <a:r>
+              <a:rPr sz="2400" spc="-65" dirty="0">
+                <a:latin typeface="Arial MT"/>
+                <a:cs typeface="Arial MT"/>
+              </a:rPr>
+              <a:t> </a:t>
+            </a:r>
+            <a:r>
               <a:rPr sz="2400" dirty="0">
                 <a:latin typeface="Arial MT"/>
                 <a:cs typeface="Arial MT"/>
               </a:rPr>
-              <a:t>Without</a:t>
-            </a:r>
-            <a:r>
-              <a:rPr sz="2400" spc="-65" dirty="0">
-                <a:latin typeface="Arial MT"/>
-                <a:cs typeface="Arial MT"/>
-              </a:rPr>
-              <a:t> </a:t>
-            </a:r>
-            <a:r>
-              <a:rPr sz="2400" dirty="0">
-                <a:latin typeface="Arial MT"/>
-                <a:cs typeface="Arial MT"/>
-              </a:rPr>
               <a:t>slope</a:t>
             </a:r>
             <a:r>
@@ -39499,7 +39413,7 @@
               </a:rPr>
               <a:t>errors</a:t>
             </a:r>
-            <a:endParaRPr sz="2400">
+            <a:endParaRPr sz="2400" dirty="0">
               <a:latin typeface="Arial MT"/>
               <a:cs typeface="Arial MT"/>
             </a:endParaRPr>
@@ -39844,7 +39758,7 @@
               </a:rPr>
               <a:t>=87.4°</a:t>
             </a:r>
-            <a:endParaRPr sz="2400">
+            <a:endParaRPr sz="2400" dirty="0">
               <a:latin typeface="Arial MT"/>
               <a:cs typeface="Arial MT"/>
             </a:endParaRPr>
@@ -39858,7 +39772,7 @@
                 <a:spcPts val="459"/>
               </a:spcBef>
             </a:pPr>
-            <a:endParaRPr sz="2400">
+            <a:endParaRPr sz="2400" dirty="0">
               <a:latin typeface="Arial MT"/>
               <a:cs typeface="Arial MT"/>
             </a:endParaRPr>
@@ -39904,7 +39818,7 @@
               </a:rPr>
               <a:t>errors</a:t>
             </a:r>
-            <a:endParaRPr sz="2400">
+            <a:endParaRPr sz="2400" dirty="0">
               <a:latin typeface="Arial MT"/>
               <a:cs typeface="Arial MT"/>
             </a:endParaRPr>
